--- a/demo/presentation.pptx
+++ b/demo/presentation.pptx
@@ -3208,7 +3208,7 @@
               </a:defRPr>
             </a:pPr>
             <a:r>
-              <a:t>Presenter: Nency Ravaliya  |  Session 21 DevOps Final Capstone</a:t>
+              <a:t>Presenter: Monika Bhardwaj  |  Session 21 DevOps Final Capstone</a:t>
             </a:r>
           </a:p>
         </p:txBody>

--- a/demo/presentation.pptx
+++ b/demo/presentation.pptx
@@ -3107,13 +3107,13 @@
         <p:spPr>
           <a:xfrm>
             <a:off x="0" y="0"/>
-            <a:ext cx="12191695" cy="6858000"/>
+            <a:ext cx="12191695" cy="2377440"/>
           </a:xfrm>
           <a:prstGeom prst="rect">
             <a:avLst/>
           </a:prstGeom>
           <a:solidFill>
-            <a:srgbClr val="0F172A"/>
+            <a:srgbClr val="0F2A44"/>
           </a:solidFill>
           <a:ln>
             <a:noFill/>
@@ -3149,8 +3149,8 @@
         </p:nvSpPr>
         <p:spPr>
           <a:xfrm>
-            <a:off x="914400" y="1828800"/>
-            <a:ext cx="10332720" cy="3200400"/>
+            <a:off x="640080" y="320040"/>
+            <a:ext cx="10881360" cy="1005840"/>
           </a:xfrm>
           <a:prstGeom prst="rect">
             <a:avLst/>
@@ -3163,10 +3163,10 @@
           </a:bodyPr>
           <a:lstStyle/>
           <a:p>
-            <a:pPr>
-              <a:defRPr sz="4800" b="1">
-                <a:solidFill>
-                  <a:srgbClr val="38BDF8"/>
+            <a:pPr algn="l">
+              <a:defRPr sz="5400" b="1">
+                <a:solidFill>
+                  <a:srgbClr val="FFFFFF"/>
                 </a:solidFill>
               </a:defRPr>
             </a:pPr>
@@ -3174,11 +3174,34 @@
               <a:t>OPSPULSE</a:t>
             </a:r>
           </a:p>
+        </p:txBody>
+      </p:sp>
+      <p:sp>
+        <p:nvSpPr>
+          <p:cNvPr id="4" name="TextBox 3"/>
+          <p:cNvSpPr txBox="1"/>
+          <p:nvPr/>
+        </p:nvSpPr>
+        <p:spPr>
+          <a:xfrm>
+            <a:off x="640080" y="1325880"/>
+            <a:ext cx="10881360" cy="731520"/>
+          </a:xfrm>
+          <a:prstGeom prst="rect">
+            <a:avLst/>
+          </a:prstGeom>
+          <a:noFill/>
+        </p:spPr>
+        <p:txBody>
+          <a:bodyPr wrap="square">
+            <a:spAutoFit/>
+          </a:bodyPr>
+          <a:lstStyle/>
           <a:p>
             <a:pPr>
               <a:defRPr sz="2400">
                 <a:solidFill>
-                  <a:srgbClr val="F8FAFC"/>
+                  <a:srgbClr val="FFFFFF"/>
                 </a:solidFill>
               </a:defRPr>
             </a:pPr>
@@ -3186,29 +3209,144 @@
               <a:t>Production-Grade DevSecOps Platform &amp; Reliability Capstone</a:t>
             </a:r>
           </a:p>
-          <a:p>
-            <a:pPr>
-              <a:defRPr sz="1400">
-                <a:solidFill>
-                  <a:srgbClr val="94A3B8"/>
-                </a:solidFill>
-              </a:defRPr>
-            </a:pPr>
-            <a:r>
-              <a:t>Automated CI/CD · Trivy Vulnerability Gates · Terraform AWS EKS · Helm &amp; GitOps · Prometheus Observability</a:t>
-            </a:r>
-          </a:p>
-          <a:p>
-            <a:br/>
-            <a:pPr>
-              <a:defRPr sz="1400">
-                <a:solidFill>
-                  <a:srgbClr val="6366F1"/>
+        </p:txBody>
+      </p:sp>
+      <p:sp>
+        <p:nvSpPr>
+          <p:cNvPr id="5" name="TextBox 4"/>
+          <p:cNvSpPr txBox="1"/>
+          <p:nvPr/>
+        </p:nvSpPr>
+        <p:spPr>
+          <a:xfrm>
+            <a:off x="640080" y="2834640"/>
+            <a:ext cx="10881360" cy="685800"/>
+          </a:xfrm>
+          <a:prstGeom prst="rect">
+            <a:avLst/>
+          </a:prstGeom>
+          <a:noFill/>
+        </p:spPr>
+        <p:txBody>
+          <a:bodyPr wrap="square">
+            <a:spAutoFit/>
+          </a:bodyPr>
+          <a:lstStyle/>
+          <a:p>
+            <a:pPr>
+              <a:defRPr sz="1700">
+                <a:solidFill>
+                  <a:srgbClr val="222222"/>
                 </a:solidFill>
               </a:defRPr>
             </a:pPr>
             <a:r>
               <a:t>Presenter: Monika Bhardwaj  |  Session 21 DevOps Final Capstone</a:t>
+            </a:r>
+          </a:p>
+        </p:txBody>
+      </p:sp>
+      <p:sp>
+        <p:nvSpPr>
+          <p:cNvPr id="6" name="TextBox 5"/>
+          <p:cNvSpPr txBox="1"/>
+          <p:nvPr/>
+        </p:nvSpPr>
+        <p:spPr>
+          <a:xfrm>
+            <a:off x="640080" y="3547872"/>
+            <a:ext cx="10881360" cy="685800"/>
+          </a:xfrm>
+          <a:prstGeom prst="rect">
+            <a:avLst/>
+          </a:prstGeom>
+          <a:noFill/>
+        </p:spPr>
+        <p:txBody>
+          <a:bodyPr wrap="square">
+            <a:spAutoFit/>
+          </a:bodyPr>
+          <a:lstStyle/>
+          <a:p>
+            <a:pPr>
+              <a:defRPr sz="1700">
+                <a:solidFill>
+                  <a:srgbClr val="222222"/>
+                </a:solidFill>
+              </a:defRPr>
+            </a:pPr>
+            <a:r>
+              <a:t>Deployment &amp; Reliability Operations Platform</a:t>
+            </a:r>
+          </a:p>
+        </p:txBody>
+      </p:sp>
+      <p:sp>
+        <p:nvSpPr>
+          <p:cNvPr id="7" name="TextBox 6"/>
+          <p:cNvSpPr txBox="1"/>
+          <p:nvPr/>
+        </p:nvSpPr>
+        <p:spPr>
+          <a:xfrm>
+            <a:off x="640080" y="4261104"/>
+            <a:ext cx="10881360" cy="685800"/>
+          </a:xfrm>
+          <a:prstGeom prst="rect">
+            <a:avLst/>
+          </a:prstGeom>
+          <a:noFill/>
+        </p:spPr>
+        <p:txBody>
+          <a:bodyPr wrap="square">
+            <a:spAutoFit/>
+          </a:bodyPr>
+          <a:lstStyle/>
+          <a:p>
+            <a:pPr>
+              <a:defRPr sz="1700">
+                <a:solidFill>
+                  <a:srgbClr val="222222"/>
+                </a:solidFill>
+              </a:defRPr>
+            </a:pPr>
+            <a:r>
+              <a:t>Automated CI/CD - Trivy Gates - Terraform AWS EKS - Helm &amp; GitOps - Observability</a:t>
+            </a:r>
+          </a:p>
+        </p:txBody>
+      </p:sp>
+      <p:sp>
+        <p:nvSpPr>
+          <p:cNvPr id="8" name="TextBox 7"/>
+          <p:cNvSpPr txBox="1"/>
+          <p:nvPr/>
+        </p:nvSpPr>
+        <p:spPr>
+          <a:xfrm>
+            <a:off x="640080" y="4974336"/>
+            <a:ext cx="10881360" cy="685800"/>
+          </a:xfrm>
+          <a:prstGeom prst="rect">
+            <a:avLst/>
+          </a:prstGeom>
+          <a:noFill/>
+        </p:spPr>
+        <p:txBody>
+          <a:bodyPr wrap="square">
+            <a:spAutoFit/>
+          </a:bodyPr>
+          <a:lstStyle/>
+          <a:p>
+            <a:pPr>
+              <a:defRPr sz="1700">
+                <a:solidFill>
+                  <a:srgbClr val="222222"/>
+                </a:solidFill>
+              </a:defRPr>
+            </a:pPr>
+            <a:r>
+              <a:t>https://github.com/Monika-Bhardwaj/OpsPulse-Deployment-Reliability-Operations-Platform</a:t>
             </a:r>
           </a:p>
         </p:txBody>
@@ -3233,221 +3371,118 @@
       <p:grpSpPr/>
       <p:sp>
         <p:nvSpPr>
-          <p:cNvPr id="2" name="Rectangle 1"/>
-          <p:cNvSpPr/>
-          <p:nvPr/>
-        </p:nvSpPr>
-        <p:spPr>
-          <a:xfrm>
-            <a:off x="0" y="0"/>
-            <a:ext cx="12191695" cy="6858000"/>
-          </a:xfrm>
-          <a:prstGeom prst="rect">
-            <a:avLst/>
-          </a:prstGeom>
-          <a:solidFill>
-            <a:srgbClr val="0F172A"/>
-          </a:solidFill>
-          <a:ln>
-            <a:noFill/>
-          </a:ln>
-        </p:spPr>
-        <p:style>
-          <a:lnRef idx="1">
-            <a:schemeClr val="accent1"/>
-          </a:lnRef>
-          <a:fillRef idx="3">
-            <a:schemeClr val="accent1"/>
-          </a:fillRef>
-          <a:effectRef idx="2">
-            <a:schemeClr val="accent1"/>
-          </a:effectRef>
-          <a:fontRef idx="minor">
-            <a:schemeClr val="lt1"/>
-          </a:fontRef>
-        </p:style>
-        <p:txBody>
-          <a:bodyPr rtlCol="0" anchor="ctr"/>
-          <a:lstStyle/>
-          <a:p>
-            <a:pPr algn="ctr"/>
-          </a:p>
-        </p:txBody>
-      </p:sp>
-      <p:sp>
-        <p:nvSpPr>
-          <p:cNvPr id="3" name="TextBox 2"/>
-          <p:cNvSpPr txBox="1"/>
-          <p:nvPr/>
-        </p:nvSpPr>
-        <p:spPr>
-          <a:xfrm>
-            <a:off x="731520" y="457200"/>
-            <a:ext cx="10698480" cy="365760"/>
-          </a:xfrm>
-          <a:prstGeom prst="rect">
-            <a:avLst/>
-          </a:prstGeom>
-          <a:noFill/>
-        </p:spPr>
-        <p:txBody>
-          <a:bodyPr wrap="square">
-            <a:spAutoFit/>
-          </a:bodyPr>
-          <a:lstStyle/>
-          <a:p>
-            <a:pPr>
-              <a:defRPr sz="1100" b="1">
-                <a:solidFill>
-                  <a:srgbClr val="38BDF8"/>
-                </a:solidFill>
-              </a:defRPr>
-            </a:pPr>
-            <a:r>
-              <a:t>OPSPULSE DEVSECOPS CAPSTONE</a:t>
-            </a:r>
-          </a:p>
-        </p:txBody>
-      </p:sp>
-      <p:sp>
-        <p:nvSpPr>
-          <p:cNvPr id="4" name="TextBox 3"/>
-          <p:cNvSpPr txBox="1"/>
-          <p:nvPr/>
-        </p:nvSpPr>
-        <p:spPr>
-          <a:xfrm>
-            <a:off x="731520" y="777240"/>
-            <a:ext cx="10698480" cy="731520"/>
-          </a:xfrm>
-          <a:prstGeom prst="rect">
-            <a:avLst/>
-          </a:prstGeom>
-          <a:noFill/>
-        </p:spPr>
-        <p:txBody>
-          <a:bodyPr wrap="square">
-            <a:spAutoFit/>
-          </a:bodyPr>
-          <a:lstStyle/>
-          <a:p>
-            <a:pPr>
-              <a:defRPr sz="2800" b="1">
-                <a:solidFill>
-                  <a:srgbClr val="F8FAFC"/>
-                </a:solidFill>
-              </a:defRPr>
-            </a:pPr>
-            <a:r>
-              <a:t>Observability: Prometheus Metrics &amp; Grafana Dashboards</a:t>
-            </a:r>
-          </a:p>
-        </p:txBody>
-      </p:sp>
-      <p:sp>
-        <p:nvSpPr>
-          <p:cNvPr id="5" name="Rounded Rectangle 4"/>
-          <p:cNvSpPr/>
-          <p:nvPr/>
-        </p:nvSpPr>
-        <p:spPr>
-          <a:xfrm>
-            <a:off x="731520" y="1645920"/>
-            <a:ext cx="10698480" cy="4572000"/>
-          </a:xfrm>
-          <a:prstGeom prst="roundRect">
-            <a:avLst/>
-          </a:prstGeom>
-          <a:solidFill>
-            <a:srgbClr val="1E293B"/>
-          </a:solidFill>
-          <a:ln>
-            <a:solidFill>
-              <a:srgbClr val="6366F1"/>
-            </a:solidFill>
-          </a:ln>
-        </p:spPr>
-        <p:style>
-          <a:lnRef idx="1">
-            <a:schemeClr val="accent1"/>
-          </a:lnRef>
-          <a:fillRef idx="3">
-            <a:schemeClr val="accent1"/>
-          </a:fillRef>
-          <a:effectRef idx="2">
-            <a:schemeClr val="accent1"/>
-          </a:effectRef>
-          <a:fontRef idx="minor">
-            <a:schemeClr val="lt1"/>
-          </a:fontRef>
-        </p:style>
-        <p:txBody>
-          <a:bodyPr rtlCol="0" anchor="ctr" wrap="square"/>
-          <a:lstStyle/>
-          <a:p>
-            <a:pPr algn="ctr">
-              <a:defRPr sz="1800" b="1">
-                <a:solidFill>
-                  <a:srgbClr val="38BDF8"/>
-                </a:solidFill>
-              </a:defRPr>
-            </a:pPr>
-            <a:r>
-              <a:t>Full-Stack SRE Metrics Architecture</a:t>
-            </a:r>
-            <a:br/>
-          </a:p>
-          <a:p>
-            <a:pPr>
-              <a:defRPr sz="1200">
-                <a:solidFill>
-                  <a:srgbClr val="F8FAFC"/>
-                </a:solidFill>
-              </a:defRPr>
-            </a:pPr>
-            <a:r>
-              <a:t>1. OpenMetrics / Prometheus Exposition: FastAPI instrumented with prometheus-fastapi-instrumentator exposing latency histograms, status codes, and endpoint request rates at /metrics.</a:t>
-            </a:r>
-            <a:br/>
-          </a:p>
-          <a:p>
-            <a:pPr>
-              <a:defRPr sz="1200">
-                <a:solidFill>
-                  <a:srgbClr val="F8FAFC"/>
-                </a:solidFill>
-              </a:defRPr>
-            </a:pPr>
-            <a:r>
-              <a:t>2. ServiceMonitor Declarative Scraping: Prometheus Operator ServiceMonitor automatically discovers and scrapes OpsPulse backend pods every 15 seconds.</a:t>
-            </a:r>
-            <a:br/>
-          </a:p>
-          <a:p>
-            <a:pPr>
-              <a:defRPr sz="1200">
-                <a:solidFill>
-                  <a:srgbClr val="F8FAFC"/>
-                </a:solidFill>
-              </a:defRPr>
-            </a:pPr>
-            <a:r>
-              <a:t>3. Golden Signals Dashboard: Custom 6-panel Grafana dashboard tracking Service Uptime (UP/DOWN), Total Request Rate (req/sec), p50/p95/p99 Latency Percentiles, and 4xx/5xx Error Rates.</a:t>
-            </a:r>
-            <a:br/>
-          </a:p>
-          <a:p>
-            <a:pPr>
-              <a:defRPr sz="1200">
-                <a:solidFill>
-                  <a:srgbClr val="F8FAFC"/>
-                </a:solidFill>
-              </a:defRPr>
-            </a:pPr>
-            <a:r>
-              <a:t>4. Operational Health Signals: Readiness probe checks PostgreSQL connection health; liveness probe detects hung processes.</a:t>
-            </a:r>
-            <a:br/>
+          <p:cNvPr id="2" name="Title 1"/>
+          <p:cNvSpPr>
+            <a:spLocks noGrp="1"/>
+          </p:cNvSpPr>
+          <p:nvPr>
+            <p:ph type="title"/>
+          </p:nvPr>
+        </p:nvSpPr>
+        <p:spPr/>
+        <p:txBody>
+          <a:bodyPr/>
+          <a:lstStyle/>
+          <a:p>
+            <a:r>
+              <a:rPr>
+                <a:solidFill>
+                  <a:srgbClr val="1B6EC3"/>
+                </a:solidFill>
+              </a:rPr>
+              <a:t>10. Troubleshooting Exercises</a:t>
+            </a:r>
+          </a:p>
+        </p:txBody>
+      </p:sp>
+      <p:sp>
+        <p:nvSpPr>
+          <p:cNvPr id="3" name="Content Placeholder 2"/>
+          <p:cNvSpPr>
+            <a:spLocks noGrp="1"/>
+          </p:cNvSpPr>
+          <p:nvPr>
+            <p:ph idx="1"/>
+          </p:nvPr>
+        </p:nvSpPr>
+        <p:spPr/>
+        <p:txBody>
+          <a:bodyPr wrap="square"/>
+          <a:lstStyle/>
+          <a:p>
+            <a:pPr>
+              <a:spcAft>
+                <a:spcPts val="800"/>
+              </a:spcAft>
+              <a:defRPr sz="2000">
+                <a:solidFill>
+                  <a:srgbClr val="222222"/>
+                </a:solidFill>
+              </a:defRPr>
+            </a:pPr>
+            <a:r>
+              <a:t>Scenario A (ImagePullBackOff): invalid image reference, diagnosed via pod events.</a:t>
+            </a:r>
+          </a:p>
+          <a:p>
+            <a:pPr>
+              <a:spcAft>
+                <a:spcPts val="800"/>
+              </a:spcAft>
+              <a:defRPr sz="2000">
+                <a:solidFill>
+                  <a:srgbClr val="222222"/>
+                </a:solidFill>
+              </a:defRPr>
+            </a:pPr>
+            <a:r>
+              <a:t>Scenario B (selector mismatch): service with zero endpoints, fixed via label alignment.</a:t>
+            </a:r>
+          </a:p>
+          <a:p>
+            <a:pPr>
+              <a:spcAft>
+                <a:spcPts val="800"/>
+              </a:spcAft>
+              <a:defRPr sz="2000">
+                <a:solidFill>
+                  <a:srgbClr val="222222"/>
+                </a:solidFill>
+              </a:defRPr>
+            </a:pPr>
+            <a:r>
+              <a:t>Both executed live in an isolated namespace with captured evidence.</a:t>
+            </a:r>
+          </a:p>
+          <a:p>
+            <a:pPr>
+              <a:spcAft>
+                <a:spcPts val="800"/>
+              </a:spcAft>
+              <a:defRPr sz="2000">
+                <a:solidFill>
+                  <a:srgbClr val="222222"/>
+                </a:solidFill>
+              </a:defRPr>
+            </a:pPr>
+            <a:r>
+              <a:t>Bonus real incidents debugged: nginx upstream DNS crash, helm/ArgoCD ingress conflict.</a:t>
+            </a:r>
+          </a:p>
+          <a:p>
+            <a:pPr>
+              <a:spcAft>
+                <a:spcPts val="800"/>
+              </a:spcAft>
+              <a:defRPr sz="2000">
+                <a:solidFill>
+                  <a:srgbClr val="222222"/>
+                </a:solidFill>
+              </a:defRPr>
+            </a:pPr>
+            <a:r>
+              <a:t>Runbooks in troubleshooting/ + docs for each symptom, cause, fix, verify cycle.</a:t>
+            </a:r>
           </a:p>
         </p:txBody>
       </p:sp>
@@ -3471,234 +3506,118 @@
       <p:grpSpPr/>
       <p:sp>
         <p:nvSpPr>
-          <p:cNvPr id="2" name="Rectangle 1"/>
-          <p:cNvSpPr/>
-          <p:nvPr/>
-        </p:nvSpPr>
-        <p:spPr>
-          <a:xfrm>
-            <a:off x="0" y="0"/>
-            <a:ext cx="12191695" cy="6858000"/>
-          </a:xfrm>
-          <a:prstGeom prst="rect">
-            <a:avLst/>
-          </a:prstGeom>
-          <a:solidFill>
-            <a:srgbClr val="0F172A"/>
-          </a:solidFill>
-          <a:ln>
-            <a:noFill/>
-          </a:ln>
-        </p:spPr>
-        <p:style>
-          <a:lnRef idx="1">
-            <a:schemeClr val="accent1"/>
-          </a:lnRef>
-          <a:fillRef idx="3">
-            <a:schemeClr val="accent1"/>
-          </a:fillRef>
-          <a:effectRef idx="2">
-            <a:schemeClr val="accent1"/>
-          </a:effectRef>
-          <a:fontRef idx="minor">
-            <a:schemeClr val="lt1"/>
-          </a:fontRef>
-        </p:style>
-        <p:txBody>
-          <a:bodyPr rtlCol="0" anchor="ctr"/>
-          <a:lstStyle/>
-          <a:p>
-            <a:pPr algn="ctr"/>
-          </a:p>
-        </p:txBody>
-      </p:sp>
-      <p:sp>
-        <p:nvSpPr>
-          <p:cNvPr id="3" name="TextBox 2"/>
-          <p:cNvSpPr txBox="1"/>
-          <p:nvPr/>
-        </p:nvSpPr>
-        <p:spPr>
-          <a:xfrm>
-            <a:off x="731520" y="457200"/>
-            <a:ext cx="10698480" cy="365760"/>
-          </a:xfrm>
-          <a:prstGeom prst="rect">
-            <a:avLst/>
-          </a:prstGeom>
-          <a:noFill/>
-        </p:spPr>
-        <p:txBody>
-          <a:bodyPr wrap="square">
-            <a:spAutoFit/>
-          </a:bodyPr>
-          <a:lstStyle/>
-          <a:p>
-            <a:pPr>
-              <a:defRPr sz="1100" b="1">
-                <a:solidFill>
-                  <a:srgbClr val="38BDF8"/>
-                </a:solidFill>
-              </a:defRPr>
-            </a:pPr>
-            <a:r>
-              <a:t>OPSPULSE DEVSECOPS CAPSTONE</a:t>
-            </a:r>
-          </a:p>
-        </p:txBody>
-      </p:sp>
-      <p:sp>
-        <p:nvSpPr>
-          <p:cNvPr id="4" name="TextBox 3"/>
-          <p:cNvSpPr txBox="1"/>
-          <p:nvPr/>
-        </p:nvSpPr>
-        <p:spPr>
-          <a:xfrm>
-            <a:off x="731520" y="777240"/>
-            <a:ext cx="10698480" cy="731520"/>
-          </a:xfrm>
-          <a:prstGeom prst="rect">
-            <a:avLst/>
-          </a:prstGeom>
-          <a:noFill/>
-        </p:spPr>
-        <p:txBody>
-          <a:bodyPr wrap="square">
-            <a:spAutoFit/>
-          </a:bodyPr>
-          <a:lstStyle/>
-          <a:p>
-            <a:pPr>
-              <a:defRPr sz="2800" b="1">
-                <a:solidFill>
-                  <a:srgbClr val="F8FAFC"/>
-                </a:solidFill>
-              </a:defRPr>
-            </a:pPr>
-            <a:r>
-              <a:t>Project Summary &amp; Engineering Takeaways</a:t>
-            </a:r>
-          </a:p>
-        </p:txBody>
-      </p:sp>
-      <p:sp>
-        <p:nvSpPr>
-          <p:cNvPr id="5" name="Rounded Rectangle 4"/>
-          <p:cNvSpPr/>
-          <p:nvPr/>
-        </p:nvSpPr>
-        <p:spPr>
-          <a:xfrm>
-            <a:off x="731520" y="1645920"/>
-            <a:ext cx="10698480" cy="4572000"/>
-          </a:xfrm>
-          <a:prstGeom prst="roundRect">
-            <a:avLst/>
-          </a:prstGeom>
-          <a:solidFill>
-            <a:srgbClr val="1E293B"/>
-          </a:solidFill>
-          <a:ln>
-            <a:solidFill>
-              <a:srgbClr val="6366F1"/>
-            </a:solidFill>
-          </a:ln>
-        </p:spPr>
-        <p:style>
-          <a:lnRef idx="1">
-            <a:schemeClr val="accent1"/>
-          </a:lnRef>
-          <a:fillRef idx="3">
-            <a:schemeClr val="accent1"/>
-          </a:fillRef>
-          <a:effectRef idx="2">
-            <a:schemeClr val="accent1"/>
-          </a:effectRef>
-          <a:fontRef idx="minor">
-            <a:schemeClr val="lt1"/>
-          </a:fontRef>
-        </p:style>
-        <p:txBody>
-          <a:bodyPr rtlCol="0" anchor="ctr" wrap="square"/>
-          <a:lstStyle/>
-          <a:p>
-            <a:pPr algn="ctr">
-              <a:defRPr sz="1800" b="1">
-                <a:solidFill>
-                  <a:srgbClr val="38BDF8"/>
-                </a:solidFill>
-              </a:defRPr>
-            </a:pPr>
-            <a:r>
-              <a:t>Key Engineering Learnings &amp; Verification Proofs</a:t>
-            </a:r>
-            <a:br/>
-          </a:p>
-          <a:p>
-            <a:pPr>
-              <a:defRPr sz="1300">
-                <a:solidFill>
-                  <a:srgbClr val="F8FAFC"/>
-                </a:solidFill>
-              </a:defRPr>
-            </a:pPr>
-            <a:r>
-              <a:t>1. Shift-Left Security Works: Integrating Trivy vulnerability gates directly into CI stops vulnerable container layers before they ever reach production.</a:t>
-            </a:r>
-            <a:br/>
-          </a:p>
-          <a:p>
-            <a:pPr>
-              <a:defRPr sz="1300">
-                <a:solidFill>
-                  <a:srgbClr val="F8FAFC"/>
-                </a:solidFill>
-              </a:defRPr>
-            </a:pPr>
-            <a:r>
-              <a:t>2. Infrastructure as Code Consistency: Using modular Terraform ensures reproducible environments without manual AWS console drift.</a:t>
-            </a:r>
-            <a:br/>
-          </a:p>
-          <a:p>
-            <a:pPr>
-              <a:defRPr sz="1300">
-                <a:solidFill>
-                  <a:srgbClr val="F8FAFC"/>
-                </a:solidFill>
-              </a:defRPr>
-            </a:pPr>
-            <a:r>
-              <a:t>3. Immutability in Release Pipelines: SHA-tagged Docker images in GHCR eliminate the 'it worked on latest' ambiguity.</a:t>
-            </a:r>
-            <a:br/>
-          </a:p>
-          <a:p>
-            <a:pPr>
-              <a:defRPr sz="1300">
-                <a:solidFill>
-                  <a:srgbClr val="F8FAFC"/>
-                </a:solidFill>
-              </a:defRPr>
-            </a:pPr>
-            <a:r>
-              <a:t>4. Observability is Mandatory: Instrumenting applications from day one provides immediate feedback on latency spikes and system errors.</a:t>
-            </a:r>
-            <a:br/>
-          </a:p>
-          <a:p>
-            <a:pPr>
-              <a:defRPr sz="1300">
-                <a:solidFill>
-                  <a:srgbClr val="F8FAFC"/>
-                </a:solidFill>
-              </a:defRPr>
-            </a:pPr>
-            <a:r>
-              <a:t>5. Complete Rubric Compliance: 100/100 points achieved across all modules (M1 through M10) with verified working artifacts.</a:t>
-            </a:r>
-            <a:br/>
+          <p:cNvPr id="2" name="Title 1"/>
+          <p:cNvSpPr>
+            <a:spLocks noGrp="1"/>
+          </p:cNvSpPr>
+          <p:nvPr>
+            <p:ph type="title"/>
+          </p:nvPr>
+        </p:nvSpPr>
+        <p:spPr/>
+        <p:txBody>
+          <a:bodyPr/>
+          <a:lstStyle/>
+          <a:p>
+            <a:r>
+              <a:rPr>
+                <a:solidFill>
+                  <a:srgbClr val="1B6EC3"/>
+                </a:solidFill>
+              </a:rPr>
+              <a:t>11. Verification, Limits &amp; Learnings</a:t>
+            </a:r>
+          </a:p>
+        </p:txBody>
+      </p:sp>
+      <p:sp>
+        <p:nvSpPr>
+          <p:cNvPr id="3" name="Content Placeholder 2"/>
+          <p:cNvSpPr>
+            <a:spLocks noGrp="1"/>
+          </p:cNvSpPr>
+          <p:nvPr>
+            <p:ph idx="1"/>
+          </p:nvPr>
+        </p:nvSpPr>
+        <p:spPr/>
+        <p:txBody>
+          <a:bodyPr wrap="square"/>
+          <a:lstStyle/>
+          <a:p>
+            <a:pPr>
+              <a:spcAft>
+                <a:spcPts val="800"/>
+              </a:spcAft>
+              <a:defRPr sz="2000">
+                <a:solidFill>
+                  <a:srgbClr val="222222"/>
+                </a:solidFill>
+              </a:defRPr>
+            </a:pPr>
+            <a:r>
+              <a:t>Locally verified: app, 34 tests, hardened images, compose stack, Helm, K8s, HPA, metrics, GitOps, CI green, GHCR push.</a:t>
+            </a:r>
+          </a:p>
+          <a:p>
+            <a:pPr>
+              <a:spcAft>
+                <a:spcPts val="800"/>
+              </a:spcAft>
+              <a:defRPr sz="2000">
+                <a:solidFill>
+                  <a:srgbClr val="222222"/>
+                </a:solidFill>
+              </a:defRPr>
+            </a:pPr>
+            <a:r>
+              <a:t>Blocked (no AWS keys for this assignment): EKS provisioning + console evidence.</a:t>
+            </a:r>
+          </a:p>
+          <a:p>
+            <a:pPr>
+              <a:spcAft>
+                <a:spcPts val="800"/>
+              </a:spcAft>
+              <a:defRPr sz="2000">
+                <a:solidFill>
+                  <a:srgbClr val="222222"/>
+                </a:solidFill>
+              </a:defRPr>
+            </a:pPr>
+            <a:r>
+              <a:t>Key learning: manifests are claims - only live cluster runs prove routing, scaling, and sync.</a:t>
+            </a:r>
+          </a:p>
+          <a:p>
+            <a:pPr>
+              <a:spcAft>
+                <a:spcPts val="800"/>
+              </a:spcAft>
+              <a:defRPr sz="2000">
+                <a:solidFill>
+                  <a:srgbClr val="222222"/>
+                </a:solidFill>
+              </a:defRPr>
+            </a:pPr>
+            <a:r>
+              <a:t>Security is a gate, not a badge: Trivy fails the build on HIGH/CRITICAL.</a:t>
+            </a:r>
+          </a:p>
+          <a:p>
+            <a:pPr>
+              <a:spcAft>
+                <a:spcPts val="800"/>
+              </a:spcAft>
+              <a:defRPr sz="2000">
+                <a:solidFill>
+                  <a:srgbClr val="222222"/>
+                </a:solidFill>
+              </a:defRPr>
+            </a:pPr>
+            <a:r>
+              <a:t>Submit: repo URL + this deck + demo video recorded per WALKTHROUGH_SCRIPT.md.</a:t>
+            </a:r>
           </a:p>
         </p:txBody>
       </p:sp>
@@ -3722,319 +3641,117 @@
       <p:grpSpPr/>
       <p:sp>
         <p:nvSpPr>
-          <p:cNvPr id="2" name="Rectangle 1"/>
-          <p:cNvSpPr/>
-          <p:nvPr/>
-        </p:nvSpPr>
-        <p:spPr>
-          <a:xfrm>
-            <a:off x="0" y="0"/>
-            <a:ext cx="12191695" cy="6858000"/>
-          </a:xfrm>
-          <a:prstGeom prst="rect">
-            <a:avLst/>
-          </a:prstGeom>
-          <a:solidFill>
-            <a:srgbClr val="0F172A"/>
-          </a:solidFill>
-          <a:ln>
-            <a:noFill/>
-          </a:ln>
-        </p:spPr>
-        <p:style>
-          <a:lnRef idx="1">
-            <a:schemeClr val="accent1"/>
-          </a:lnRef>
-          <a:fillRef idx="3">
-            <a:schemeClr val="accent1"/>
-          </a:fillRef>
-          <a:effectRef idx="2">
-            <a:schemeClr val="accent1"/>
-          </a:effectRef>
-          <a:fontRef idx="minor">
-            <a:schemeClr val="lt1"/>
-          </a:fontRef>
-        </p:style>
-        <p:txBody>
-          <a:bodyPr rtlCol="0" anchor="ctr"/>
-          <a:lstStyle/>
-          <a:p>
-            <a:pPr algn="ctr"/>
-          </a:p>
-        </p:txBody>
-      </p:sp>
-      <p:sp>
-        <p:nvSpPr>
-          <p:cNvPr id="3" name="TextBox 2"/>
-          <p:cNvSpPr txBox="1"/>
-          <p:nvPr/>
-        </p:nvSpPr>
-        <p:spPr>
-          <a:xfrm>
-            <a:off x="731520" y="457200"/>
-            <a:ext cx="10698480" cy="365760"/>
-          </a:xfrm>
-          <a:prstGeom prst="rect">
-            <a:avLst/>
-          </a:prstGeom>
-          <a:noFill/>
-        </p:spPr>
-        <p:txBody>
-          <a:bodyPr wrap="square">
-            <a:spAutoFit/>
-          </a:bodyPr>
-          <a:lstStyle/>
-          <a:p>
-            <a:pPr>
-              <a:defRPr sz="1100" b="1">
-                <a:solidFill>
-                  <a:srgbClr val="38BDF8"/>
-                </a:solidFill>
-              </a:defRPr>
-            </a:pPr>
-            <a:r>
-              <a:t>OPSPULSE DEVSECOPS CAPSTONE</a:t>
-            </a:r>
-          </a:p>
-        </p:txBody>
-      </p:sp>
-      <p:sp>
-        <p:nvSpPr>
-          <p:cNvPr id="4" name="TextBox 3"/>
-          <p:cNvSpPr txBox="1"/>
-          <p:nvPr/>
-        </p:nvSpPr>
-        <p:spPr>
-          <a:xfrm>
-            <a:off x="731520" y="777240"/>
-            <a:ext cx="10698480" cy="731520"/>
-          </a:xfrm>
-          <a:prstGeom prst="rect">
-            <a:avLst/>
-          </a:prstGeom>
-          <a:noFill/>
-        </p:spPr>
-        <p:txBody>
-          <a:bodyPr wrap="square">
-            <a:spAutoFit/>
-          </a:bodyPr>
-          <a:lstStyle/>
-          <a:p>
-            <a:pPr>
-              <a:defRPr sz="2800" b="1">
-                <a:solidFill>
-                  <a:srgbClr val="F8FAFC"/>
-                </a:solidFill>
-              </a:defRPr>
-            </a:pPr>
-            <a:r>
-              <a:t>Project Overview &amp; Engineering Purpose</a:t>
-            </a:r>
-          </a:p>
-        </p:txBody>
-      </p:sp>
-      <p:sp>
-        <p:nvSpPr>
-          <p:cNvPr id="5" name="Rounded Rectangle 4"/>
-          <p:cNvSpPr/>
-          <p:nvPr/>
-        </p:nvSpPr>
-        <p:spPr>
-          <a:xfrm>
-            <a:off x="731520" y="1645920"/>
-            <a:ext cx="5120640" cy="4572000"/>
-          </a:xfrm>
-          <a:prstGeom prst="roundRect">
-            <a:avLst/>
-          </a:prstGeom>
-          <a:solidFill>
-            <a:srgbClr val="1E293B"/>
-          </a:solidFill>
-          <a:ln>
-            <a:solidFill>
-              <a:srgbClr val="6366F1"/>
-            </a:solidFill>
-          </a:ln>
-        </p:spPr>
-        <p:style>
-          <a:lnRef idx="1">
-            <a:schemeClr val="accent1"/>
-          </a:lnRef>
-          <a:fillRef idx="3">
-            <a:schemeClr val="accent1"/>
-          </a:fillRef>
-          <a:effectRef idx="2">
-            <a:schemeClr val="accent1"/>
-          </a:effectRef>
-          <a:fontRef idx="minor">
-            <a:schemeClr val="lt1"/>
-          </a:fontRef>
-        </p:style>
-        <p:txBody>
-          <a:bodyPr rtlCol="0" anchor="ctr" wrap="square"/>
-          <a:lstStyle/>
-          <a:p>
-            <a:pPr algn="ctr">
-              <a:defRPr sz="2000" b="1">
-                <a:solidFill>
-                  <a:srgbClr val="38BDF8"/>
-                </a:solidFill>
-              </a:defRPr>
-            </a:pPr>
-            <a:r>
-              <a:t>The OpsPulse Mission</a:t>
-            </a:r>
-            <a:br/>
-          </a:p>
-          <a:p>
-            <a:pPr>
-              <a:defRPr sz="1300">
-                <a:solidFill>
-                  <a:srgbClr val="F8FAFC"/>
-                </a:solidFill>
-              </a:defRPr>
-            </a:pPr>
-            <a:r>
-              <a:t>• A centralized platform for tracking cloud deployments, incidents, and system health in real-time.</a:t>
-            </a:r>
-          </a:p>
-          <a:p>
-            <a:pPr>
-              <a:defRPr sz="1300">
-                <a:solidFill>
-                  <a:srgbClr val="F8FAFC"/>
-                </a:solidFill>
-              </a:defRPr>
-            </a:pPr>
-            <a:r>
-              <a:t>• Solves visibility silos across modern microservices and infrastructure environments.</a:t>
-            </a:r>
-          </a:p>
-          <a:p>
-            <a:pPr>
-              <a:defRPr sz="1300">
-                <a:solidFill>
-                  <a:srgbClr val="F8FAFC"/>
-                </a:solidFill>
-              </a:defRPr>
-            </a:pPr>
-            <a:r>
-              <a:t>• Demonstrates complete software delivery lifecycle: code to cloud in an automated, secure pipeline.</a:t>
-            </a:r>
-          </a:p>
-          <a:p>
-            <a:pPr>
-              <a:defRPr sz="1300">
-                <a:solidFill>
-                  <a:srgbClr val="F8FAFC"/>
-                </a:solidFill>
-              </a:defRPr>
-            </a:pPr>
-            <a:r>
-              <a:t>• Built to adhere strictly to production enterprise DevSecOps standards (OWASP, CIS, GitOps).</a:t>
-            </a:r>
-          </a:p>
-        </p:txBody>
-      </p:sp>
-      <p:sp>
-        <p:nvSpPr>
-          <p:cNvPr id="6" name="Rounded Rectangle 5"/>
-          <p:cNvSpPr/>
-          <p:nvPr/>
-        </p:nvSpPr>
-        <p:spPr>
-          <a:xfrm>
-            <a:off x="6217920" y="1645920"/>
-            <a:ext cx="5212080" cy="4572000"/>
-          </a:xfrm>
-          <a:prstGeom prst="roundRect">
-            <a:avLst/>
-          </a:prstGeom>
-          <a:solidFill>
-            <a:srgbClr val="1E293B"/>
-          </a:solidFill>
-          <a:ln>
-            <a:solidFill>
-              <a:srgbClr val="6366F1"/>
-            </a:solidFill>
-          </a:ln>
-        </p:spPr>
-        <p:style>
-          <a:lnRef idx="1">
-            <a:schemeClr val="accent1"/>
-          </a:lnRef>
-          <a:fillRef idx="3">
-            <a:schemeClr val="accent1"/>
-          </a:fillRef>
-          <a:effectRef idx="2">
-            <a:schemeClr val="accent1"/>
-          </a:effectRef>
-          <a:fontRef idx="minor">
-            <a:schemeClr val="lt1"/>
-          </a:fontRef>
-        </p:style>
-        <p:txBody>
-          <a:bodyPr rtlCol="0" anchor="ctr" wrap="square"/>
-          <a:lstStyle/>
-          <a:p>
-            <a:pPr algn="ctr">
-              <a:defRPr sz="2000" b="1">
-                <a:solidFill>
-                  <a:srgbClr val="38BDF8"/>
-                </a:solidFill>
-              </a:defRPr>
-            </a:pPr>
-            <a:r>
-              <a:t>Core Functional Capabilities</a:t>
-            </a:r>
-            <a:br/>
-          </a:p>
-          <a:p>
-            <a:pPr>
-              <a:defRPr sz="1300">
-                <a:solidFill>
-                  <a:srgbClr val="F8FAFC"/>
-                </a:solidFill>
-              </a:defRPr>
-            </a:pPr>
-            <a:r>
-              <a:t>• Deployment Tracking: Multi-environment release ledger with status transitions and rollback history.</a:t>
-            </a:r>
-          </a:p>
-          <a:p>
-            <a:pPr>
-              <a:defRPr sz="1300">
-                <a:solidFill>
-                  <a:srgbClr val="F8FAFC"/>
-                </a:solidFill>
-              </a:defRPr>
-            </a:pPr>
-            <a:r>
-              <a:t>• Incident Management: Severity-ranked incident tracking with resolution time (MTTR) calculation.</a:t>
-            </a:r>
-          </a:p>
-          <a:p>
-            <a:pPr>
-              <a:defRPr sz="1300">
-                <a:solidFill>
-                  <a:srgbClr val="F8FAFC"/>
-                </a:solidFill>
-              </a:defRPr>
-            </a:pPr>
-            <a:r>
-              <a:t>• Health &amp; Metrics: Built-in Prometheus instrumentation exposing /metrics, /health, and /ready.</a:t>
-            </a:r>
-          </a:p>
-          <a:p>
-            <a:pPr>
-              <a:defRPr sz="1300">
-                <a:solidFill>
-                  <a:srgbClr val="F8FAFC"/>
-                </a:solidFill>
-              </a:defRPr>
-            </a:pPr>
-            <a:r>
-              <a:t>• Modern SPA Frontend: Rich glassmorphic dashboard built in React 18, Vite, and responsive CSS.</a:t>
+          <p:cNvPr id="2" name="Title 1"/>
+          <p:cNvSpPr>
+            <a:spLocks noGrp="1"/>
+          </p:cNvSpPr>
+          <p:nvPr>
+            <p:ph type="title"/>
+          </p:nvPr>
+        </p:nvSpPr>
+        <p:spPr/>
+        <p:txBody>
+          <a:bodyPr/>
+          <a:lstStyle/>
+          <a:p>
+            <a:r>
+              <a:rPr>
+                <a:solidFill>
+                  <a:srgbClr val="1B6EC3"/>
+                </a:solidFill>
+              </a:rPr>
+              <a:t>2. Project Overview &amp; Purpose</a:t>
+            </a:r>
+          </a:p>
+        </p:txBody>
+      </p:sp>
+      <p:sp>
+        <p:nvSpPr>
+          <p:cNvPr id="3" name="Content Placeholder 2"/>
+          <p:cNvSpPr>
+            <a:spLocks noGrp="1"/>
+          </p:cNvSpPr>
+          <p:nvPr>
+            <p:ph idx="1"/>
+          </p:nvPr>
+        </p:nvSpPr>
+        <p:spPr/>
+        <p:txBody>
+          <a:bodyPr wrap="square"/>
+          <a:lstStyle/>
+          <a:p>
+            <a:pPr>
+              <a:spcAft>
+                <a:spcPts val="800"/>
+              </a:spcAft>
+              <a:defRPr sz="2000">
+                <a:solidFill>
+                  <a:srgbClr val="222222"/>
+                </a:solidFill>
+              </a:defRPr>
+            </a:pPr>
+            <a:r>
+              <a:t>Centralized tracking of cloud deployments, incidents, and service health in real time.</a:t>
+            </a:r>
+          </a:p>
+          <a:p>
+            <a:pPr>
+              <a:spcAft>
+                <a:spcPts val="800"/>
+              </a:spcAft>
+              <a:defRPr sz="2000">
+                <a:solidFill>
+                  <a:srgbClr val="222222"/>
+                </a:solidFill>
+              </a:defRPr>
+            </a:pPr>
+            <a:r>
+              <a:t>Solves visibility silos across microservices and multi-environment infrastructure.</a:t>
+            </a:r>
+          </a:p>
+          <a:p>
+            <a:pPr>
+              <a:spcAft>
+                <a:spcPts val="800"/>
+              </a:spcAft>
+              <a:defRPr sz="2000">
+                <a:solidFill>
+                  <a:srgbClr val="222222"/>
+                </a:solidFill>
+              </a:defRPr>
+            </a:pPr>
+            <a:r>
+              <a:t>Full delivery lifecycle: code to cloud through an automated, secure pipeline.</a:t>
+            </a:r>
+          </a:p>
+          <a:p>
+            <a:pPr>
+              <a:spcAft>
+                <a:spcPts val="800"/>
+              </a:spcAft>
+              <a:defRPr sz="2000">
+                <a:solidFill>
+                  <a:srgbClr val="222222"/>
+                </a:solidFill>
+              </a:defRPr>
+            </a:pPr>
+            <a:r>
+              <a:t>Deployment ledger with status transitions (PENDING &gt; RUNNING &gt; SUCCESS / FAILED).</a:t>
+            </a:r>
+          </a:p>
+          <a:p>
+            <a:pPr>
+              <a:spcAft>
+                <a:spcPts val="800"/>
+              </a:spcAft>
+              <a:defRPr sz="2000">
+                <a:solidFill>
+                  <a:srgbClr val="222222"/>
+                </a:solidFill>
+              </a:defRPr>
+            </a:pPr>
+            <a:r>
+              <a:t>Severity-ranked incident management with MTTR tracking.</a:t>
             </a:r>
           </a:p>
         </p:txBody>
@@ -4059,473 +3776,132 @@
       <p:grpSpPr/>
       <p:sp>
         <p:nvSpPr>
-          <p:cNvPr id="2" name="Rectangle 1"/>
-          <p:cNvSpPr/>
-          <p:nvPr/>
-        </p:nvSpPr>
-        <p:spPr>
-          <a:xfrm>
-            <a:off x="0" y="0"/>
-            <a:ext cx="12191695" cy="6858000"/>
-          </a:xfrm>
-          <a:prstGeom prst="rect">
-            <a:avLst/>
-          </a:prstGeom>
-          <a:solidFill>
-            <a:srgbClr val="0F172A"/>
-          </a:solidFill>
-          <a:ln>
-            <a:noFill/>
-          </a:ln>
-        </p:spPr>
-        <p:style>
-          <a:lnRef idx="1">
-            <a:schemeClr val="accent1"/>
-          </a:lnRef>
-          <a:fillRef idx="3">
-            <a:schemeClr val="accent1"/>
-          </a:fillRef>
-          <a:effectRef idx="2">
-            <a:schemeClr val="accent1"/>
-          </a:effectRef>
-          <a:fontRef idx="minor">
-            <a:schemeClr val="lt1"/>
-          </a:fontRef>
-        </p:style>
-        <p:txBody>
-          <a:bodyPr rtlCol="0" anchor="ctr"/>
-          <a:lstStyle/>
-          <a:p>
-            <a:pPr algn="ctr"/>
-          </a:p>
-        </p:txBody>
-      </p:sp>
-      <p:sp>
-        <p:nvSpPr>
-          <p:cNvPr id="3" name="TextBox 2"/>
-          <p:cNvSpPr txBox="1"/>
-          <p:nvPr/>
-        </p:nvSpPr>
-        <p:spPr>
-          <a:xfrm>
-            <a:off x="731520" y="457200"/>
-            <a:ext cx="10698480" cy="365760"/>
-          </a:xfrm>
-          <a:prstGeom prst="rect">
-            <a:avLst/>
-          </a:prstGeom>
-          <a:noFill/>
-        </p:spPr>
-        <p:txBody>
-          <a:bodyPr wrap="square">
-            <a:spAutoFit/>
-          </a:bodyPr>
-          <a:lstStyle/>
-          <a:p>
-            <a:pPr>
-              <a:defRPr sz="1100" b="1">
-                <a:solidFill>
-                  <a:srgbClr val="38BDF8"/>
-                </a:solidFill>
-              </a:defRPr>
-            </a:pPr>
-            <a:r>
-              <a:t>OPSPULSE DEVSECOPS CAPSTONE</a:t>
-            </a:r>
-          </a:p>
-        </p:txBody>
-      </p:sp>
-      <p:sp>
-        <p:nvSpPr>
-          <p:cNvPr id="4" name="TextBox 3"/>
-          <p:cNvSpPr txBox="1"/>
-          <p:nvPr/>
-        </p:nvSpPr>
-        <p:spPr>
-          <a:xfrm>
-            <a:off x="731520" y="777240"/>
-            <a:ext cx="10698480" cy="731520"/>
-          </a:xfrm>
-          <a:prstGeom prst="rect">
-            <a:avLst/>
-          </a:prstGeom>
-          <a:noFill/>
-        </p:spPr>
-        <p:txBody>
-          <a:bodyPr wrap="square">
-            <a:spAutoFit/>
-          </a:bodyPr>
-          <a:lstStyle/>
-          <a:p>
-            <a:pPr>
-              <a:defRPr sz="2800" b="1">
-                <a:solidFill>
-                  <a:srgbClr val="F8FAFC"/>
-                </a:solidFill>
-              </a:defRPr>
-            </a:pPr>
-            <a:r>
-              <a:t>Comprehensive Enterprise Technology Stack</a:t>
-            </a:r>
-          </a:p>
-        </p:txBody>
-      </p:sp>
-      <p:sp>
-        <p:nvSpPr>
-          <p:cNvPr id="5" name="Rounded Rectangle 4"/>
-          <p:cNvSpPr/>
-          <p:nvPr/>
-        </p:nvSpPr>
-        <p:spPr>
-          <a:xfrm>
-            <a:off x="731520" y="1645920"/>
-            <a:ext cx="5212080" cy="2194560"/>
-          </a:xfrm>
-          <a:prstGeom prst="roundRect">
-            <a:avLst/>
-          </a:prstGeom>
-          <a:solidFill>
-            <a:srgbClr val="1E293B"/>
-          </a:solidFill>
-          <a:ln>
-            <a:solidFill>
-              <a:srgbClr val="6366F1"/>
-            </a:solidFill>
-          </a:ln>
-        </p:spPr>
-        <p:style>
-          <a:lnRef idx="1">
-            <a:schemeClr val="accent1"/>
-          </a:lnRef>
-          <a:fillRef idx="3">
-            <a:schemeClr val="accent1"/>
-          </a:fillRef>
-          <a:effectRef idx="2">
-            <a:schemeClr val="accent1"/>
-          </a:effectRef>
-          <a:fontRef idx="minor">
-            <a:schemeClr val="lt1"/>
-          </a:fontRef>
-        </p:style>
-        <p:txBody>
-          <a:bodyPr rtlCol="0" anchor="ctr" wrap="square"/>
-          <a:lstStyle/>
-          <a:p>
-            <a:pPr algn="ctr">
-              <a:defRPr sz="1600" b="1">
-                <a:solidFill>
-                  <a:srgbClr val="38BDF8"/>
-                </a:solidFill>
-              </a:defRPr>
-            </a:pPr>
-            <a:r>
-              <a:t>Application Layer</a:t>
-            </a:r>
-          </a:p>
-          <a:p>
-            <a:pPr>
-              <a:defRPr sz="1100">
-                <a:solidFill>
-                  <a:srgbClr val="F8FAFC"/>
-                </a:solidFill>
-              </a:defRPr>
-            </a:pPr>
-            <a:r>
-              <a:t>Frontend: React 18, Vite, Vanilla CSS Design System, Nginx 1.27</a:t>
-            </a:r>
-          </a:p>
-          <a:p>
-            <a:pPr>
-              <a:defRPr sz="1100">
-                <a:solidFill>
-                  <a:srgbClr val="F8FAFC"/>
-                </a:solidFill>
-              </a:defRPr>
-            </a:pPr>
-            <a:r>
-              <a:t>Backend: Python 3.12, FastAPI, SQLAlchemy 2.0, Alembic, Pydantic V2</a:t>
-            </a:r>
-          </a:p>
-          <a:p>
-            <a:pPr>
-              <a:defRPr sz="1100">
-                <a:solidFill>
-                  <a:srgbClr val="F8FAFC"/>
-                </a:solidFill>
-              </a:defRPr>
-            </a:pPr>
-            <a:r>
-              <a:t>Database: PostgreSQL 16 Alpine, connection pooling via psycopg3</a:t>
-            </a:r>
-          </a:p>
-        </p:txBody>
-      </p:sp>
-      <p:sp>
-        <p:nvSpPr>
-          <p:cNvPr id="6" name="Rounded Rectangle 5"/>
-          <p:cNvSpPr/>
-          <p:nvPr/>
-        </p:nvSpPr>
-        <p:spPr>
-          <a:xfrm>
-            <a:off x="6217920" y="1645920"/>
-            <a:ext cx="5212080" cy="2194560"/>
-          </a:xfrm>
-          <a:prstGeom prst="roundRect">
-            <a:avLst/>
-          </a:prstGeom>
-          <a:solidFill>
-            <a:srgbClr val="1E293B"/>
-          </a:solidFill>
-          <a:ln>
-            <a:solidFill>
-              <a:srgbClr val="6366F1"/>
-            </a:solidFill>
-          </a:ln>
-        </p:spPr>
-        <p:style>
-          <a:lnRef idx="1">
-            <a:schemeClr val="accent1"/>
-          </a:lnRef>
-          <a:fillRef idx="3">
-            <a:schemeClr val="accent1"/>
-          </a:fillRef>
-          <a:effectRef idx="2">
-            <a:schemeClr val="accent1"/>
-          </a:effectRef>
-          <a:fontRef idx="minor">
-            <a:schemeClr val="lt1"/>
-          </a:fontRef>
-        </p:style>
-        <p:txBody>
-          <a:bodyPr rtlCol="0" anchor="ctr" wrap="square"/>
-          <a:lstStyle/>
-          <a:p>
-            <a:pPr algn="ctr">
-              <a:defRPr sz="1600" b="1">
-                <a:solidFill>
-                  <a:srgbClr val="38BDF8"/>
-                </a:solidFill>
-              </a:defRPr>
-            </a:pPr>
-            <a:r>
-              <a:t>Container &amp; Security</a:t>
-            </a:r>
-          </a:p>
-          <a:p>
-            <a:pPr>
-              <a:defRPr sz="1100">
-                <a:solidFill>
-                  <a:srgbClr val="F8FAFC"/>
-                </a:solidFill>
-              </a:defRPr>
-            </a:pPr>
-            <a:r>
-              <a:t>Containerization: Multi-stage Dockerfiles with unprivileged non-root users (UID 10001)</a:t>
-            </a:r>
-          </a:p>
-          <a:p>
-            <a:pPr>
-              <a:defRPr sz="1100">
-                <a:solidFill>
-                  <a:srgbClr val="F8FAFC"/>
-                </a:solidFill>
-              </a:defRPr>
-            </a:pPr>
-            <a:r>
-              <a:t>Scanning: Aquasecurity Trivy with HIGH/CRITICAL automated build gate</a:t>
-            </a:r>
-          </a:p>
-          <a:p>
-            <a:pPr>
-              <a:defRPr sz="1100">
-                <a:solidFill>
-                  <a:srgbClr val="F8FAFC"/>
-                </a:solidFill>
-              </a:defRPr>
-            </a:pPr>
-            <a:r>
-              <a:t>Registry: GitHub Container Registry (GHCR) with immutable SHA-tagged digests</a:t>
-            </a:r>
-          </a:p>
-        </p:txBody>
-      </p:sp>
-      <p:sp>
-        <p:nvSpPr>
-          <p:cNvPr id="7" name="Rounded Rectangle 6"/>
-          <p:cNvSpPr/>
-          <p:nvPr/>
-        </p:nvSpPr>
-        <p:spPr>
-          <a:xfrm>
-            <a:off x="731520" y="4114800"/>
-            <a:ext cx="5212080" cy="2194560"/>
-          </a:xfrm>
-          <a:prstGeom prst="roundRect">
-            <a:avLst/>
-          </a:prstGeom>
-          <a:solidFill>
-            <a:srgbClr val="1E293B"/>
-          </a:solidFill>
-          <a:ln>
-            <a:solidFill>
-              <a:srgbClr val="6366F1"/>
-            </a:solidFill>
-          </a:ln>
-        </p:spPr>
-        <p:style>
-          <a:lnRef idx="1">
-            <a:schemeClr val="accent1"/>
-          </a:lnRef>
-          <a:fillRef idx="3">
-            <a:schemeClr val="accent1"/>
-          </a:fillRef>
-          <a:effectRef idx="2">
-            <a:schemeClr val="accent1"/>
-          </a:effectRef>
-          <a:fontRef idx="minor">
-            <a:schemeClr val="lt1"/>
-          </a:fontRef>
-        </p:style>
-        <p:txBody>
-          <a:bodyPr rtlCol="0" anchor="ctr" wrap="square"/>
-          <a:lstStyle/>
-          <a:p>
-            <a:pPr algn="ctr">
-              <a:defRPr sz="1600" b="1">
-                <a:solidFill>
-                  <a:srgbClr val="38BDF8"/>
-                </a:solidFill>
-              </a:defRPr>
-            </a:pPr>
-            <a:r>
-              <a:t>Infrastructure as Code</a:t>
-            </a:r>
-          </a:p>
-          <a:p>
-            <a:pPr>
-              <a:defRPr sz="1100">
-                <a:solidFill>
-                  <a:srgbClr val="F8FAFC"/>
-                </a:solidFill>
-              </a:defRPr>
-            </a:pPr>
-            <a:r>
-              <a:t>IaC Tool: HashiCorp Terraform v1.16+ with modularized VPC and EKS modules</a:t>
-            </a:r>
-          </a:p>
-          <a:p>
-            <a:pPr>
-              <a:defRPr sz="1100">
-                <a:solidFill>
-                  <a:srgbClr val="F8FAFC"/>
-                </a:solidFill>
-              </a:defRPr>
-            </a:pPr>
-            <a:r>
-              <a:t>Cloud Provider: Amazon Web Services (AWS ap-south-1)</a:t>
-            </a:r>
-          </a:p>
-          <a:p>
-            <a:pPr>
-              <a:defRPr sz="1100">
-                <a:solidFill>
-                  <a:srgbClr val="F8FAFC"/>
-                </a:solidFill>
-              </a:defRPr>
-            </a:pPr>
-            <a:r>
-              <a:t>Compute: Amazon EKS 1.31 with managed node groups across multi-AZ public/private subnets</a:t>
-            </a:r>
-          </a:p>
-        </p:txBody>
-      </p:sp>
-      <p:sp>
-        <p:nvSpPr>
-          <p:cNvPr id="8" name="Rounded Rectangle 7"/>
-          <p:cNvSpPr/>
-          <p:nvPr/>
-        </p:nvSpPr>
-        <p:spPr>
-          <a:xfrm>
-            <a:off x="6217920" y="4114800"/>
-            <a:ext cx="5212080" cy="2194560"/>
-          </a:xfrm>
-          <a:prstGeom prst="roundRect">
-            <a:avLst/>
-          </a:prstGeom>
-          <a:solidFill>
-            <a:srgbClr val="1E293B"/>
-          </a:solidFill>
-          <a:ln>
-            <a:solidFill>
-              <a:srgbClr val="6366F1"/>
-            </a:solidFill>
-          </a:ln>
-        </p:spPr>
-        <p:style>
-          <a:lnRef idx="1">
-            <a:schemeClr val="accent1"/>
-          </a:lnRef>
-          <a:fillRef idx="3">
-            <a:schemeClr val="accent1"/>
-          </a:fillRef>
-          <a:effectRef idx="2">
-            <a:schemeClr val="accent1"/>
-          </a:effectRef>
-          <a:fontRef idx="minor">
-            <a:schemeClr val="lt1"/>
-          </a:fontRef>
-        </p:style>
-        <p:txBody>
-          <a:bodyPr rtlCol="0" anchor="ctr" wrap="square"/>
-          <a:lstStyle/>
-          <a:p>
-            <a:pPr algn="ctr">
-              <a:defRPr sz="1600" b="1">
-                <a:solidFill>
-                  <a:srgbClr val="38BDF8"/>
-                </a:solidFill>
-              </a:defRPr>
-            </a:pPr>
-            <a:r>
-              <a:t>Kubernetes &amp; Observability</a:t>
-            </a:r>
-          </a:p>
-          <a:p>
-            <a:pPr>
-              <a:defRPr sz="1100">
-                <a:solidFill>
-                  <a:srgbClr val="F8FAFC"/>
-                </a:solidFill>
-              </a:defRPr>
-            </a:pPr>
-            <a:r>
-              <a:t>Orchestration: Kubernetes 1.31, Helm v3 packaging, Ingress-Nginx routing</a:t>
-            </a:r>
-          </a:p>
-          <a:p>
-            <a:pPr>
-              <a:defRPr sz="1100">
-                <a:solidFill>
-                  <a:srgbClr val="F8FAFC"/>
-                </a:solidFill>
-              </a:defRPr>
-            </a:pPr>
-            <a:r>
-              <a:t>Continuous Delivery: ArgoCD GitOps declarative reconciliation</a:t>
-            </a:r>
-          </a:p>
-          <a:p>
-            <a:pPr>
-              <a:defRPr sz="1100">
-                <a:solidFill>
-                  <a:srgbClr val="F8FAFC"/>
-                </a:solidFill>
-              </a:defRPr>
-            </a:pPr>
-            <a:r>
-              <a:t>Observability: Prometheus metrics scraping &amp; Grafana monitoring dashboards</a:t>
+          <p:cNvPr id="2" name="Title 1"/>
+          <p:cNvSpPr>
+            <a:spLocks noGrp="1"/>
+          </p:cNvSpPr>
+          <p:nvPr>
+            <p:ph type="title"/>
+          </p:nvPr>
+        </p:nvSpPr>
+        <p:spPr/>
+        <p:txBody>
+          <a:bodyPr/>
+          <a:lstStyle/>
+          <a:p>
+            <a:r>
+              <a:rPr>
+                <a:solidFill>
+                  <a:srgbClr val="1B6EC3"/>
+                </a:solidFill>
+              </a:rPr>
+              <a:t>3. Technology Stack</a:t>
+            </a:r>
+          </a:p>
+        </p:txBody>
+      </p:sp>
+      <p:sp>
+        <p:nvSpPr>
+          <p:cNvPr id="3" name="Content Placeholder 2"/>
+          <p:cNvSpPr>
+            <a:spLocks noGrp="1"/>
+          </p:cNvSpPr>
+          <p:nvPr>
+            <p:ph idx="1"/>
+          </p:nvPr>
+        </p:nvSpPr>
+        <p:spPr/>
+        <p:txBody>
+          <a:bodyPr wrap="square"/>
+          <a:lstStyle/>
+          <a:p>
+            <a:pPr>
+              <a:spcAft>
+                <a:spcPts val="800"/>
+              </a:spcAft>
+              <a:defRPr sz="2000">
+                <a:solidFill>
+                  <a:srgbClr val="222222"/>
+                </a:solidFill>
+              </a:defRPr>
+            </a:pPr>
+            <a:r>
+              <a:t>Frontend: React 18 + Vite, Nginx runtime, responsive CSS dashboard.</a:t>
+            </a:r>
+          </a:p>
+          <a:p>
+            <a:pPr>
+              <a:spcAft>
+                <a:spcPts val="800"/>
+              </a:spcAft>
+              <a:defRPr sz="2000">
+                <a:solidFill>
+                  <a:srgbClr val="222222"/>
+                </a:solidFill>
+              </a:defRPr>
+            </a:pPr>
+            <a:r>
+              <a:t>Backend: Python 3.12, FastAPI, SQLAlchemy 2.0, Alembic, Pydantic V2.</a:t>
+            </a:r>
+          </a:p>
+          <a:p>
+            <a:pPr>
+              <a:spcAft>
+                <a:spcPts val="800"/>
+              </a:spcAft>
+              <a:defRPr sz="2000">
+                <a:solidFill>
+                  <a:srgbClr val="222222"/>
+                </a:solidFill>
+              </a:defRPr>
+            </a:pPr>
+            <a:r>
+              <a:t>Database: PostgreSQL 16 (psycopg3 pooling); SQLite for isolated tests.</a:t>
+            </a:r>
+          </a:p>
+          <a:p>
+            <a:pPr>
+              <a:spcAft>
+                <a:spcPts val="800"/>
+              </a:spcAft>
+              <a:defRPr sz="2000">
+                <a:solidFill>
+                  <a:srgbClr val="222222"/>
+                </a:solidFill>
+              </a:defRPr>
+            </a:pPr>
+            <a:r>
+              <a:t>Containers: multi-stage Dockerfiles, non-root UID 10001, GHCR registry.</a:t>
+            </a:r>
+          </a:p>
+          <a:p>
+            <a:pPr>
+              <a:spcAft>
+                <a:spcPts val="800"/>
+              </a:spcAft>
+              <a:defRPr sz="2000">
+                <a:solidFill>
+                  <a:srgbClr val="222222"/>
+                </a:solidFill>
+              </a:defRPr>
+            </a:pPr>
+            <a:r>
+              <a:t>IaC: Terraform (VPC + EKS 1.31, ap-south-1) - K8s: Helm, Ingress, HPA, ArgoCD.</a:t>
+            </a:r>
+          </a:p>
+          <a:p>
+            <a:pPr>
+              <a:spcAft>
+                <a:spcPts val="800"/>
+              </a:spcAft>
+              <a:defRPr sz="2000">
+                <a:solidFill>
+                  <a:srgbClr val="222222"/>
+                </a:solidFill>
+              </a:defRPr>
+            </a:pPr>
+            <a:r>
+              <a:t>Observability: Prometheus /metrics + Grafana dashboard - CI: GitHub Actions + Trivy.</a:t>
             </a:r>
           </a:p>
         </p:txBody>
@@ -4550,234 +3926,133 @@
       <p:grpSpPr/>
       <p:sp>
         <p:nvSpPr>
-          <p:cNvPr id="2" name="Rectangle 1"/>
-          <p:cNvSpPr/>
-          <p:nvPr/>
-        </p:nvSpPr>
-        <p:spPr>
-          <a:xfrm>
-            <a:off x="0" y="0"/>
-            <a:ext cx="12191695" cy="6858000"/>
-          </a:xfrm>
-          <a:prstGeom prst="rect">
-            <a:avLst/>
-          </a:prstGeom>
-          <a:solidFill>
-            <a:srgbClr val="0F172A"/>
-          </a:solidFill>
-          <a:ln>
-            <a:noFill/>
-          </a:ln>
-        </p:spPr>
-        <p:style>
-          <a:lnRef idx="1">
-            <a:schemeClr val="accent1"/>
-          </a:lnRef>
-          <a:fillRef idx="3">
-            <a:schemeClr val="accent1"/>
-          </a:fillRef>
-          <a:effectRef idx="2">
-            <a:schemeClr val="accent1"/>
-          </a:effectRef>
-          <a:fontRef idx="minor">
-            <a:schemeClr val="lt1"/>
-          </a:fontRef>
-        </p:style>
-        <p:txBody>
-          <a:bodyPr rtlCol="0" anchor="ctr"/>
-          <a:lstStyle/>
-          <a:p>
-            <a:pPr algn="ctr"/>
-          </a:p>
-        </p:txBody>
-      </p:sp>
-      <p:sp>
-        <p:nvSpPr>
-          <p:cNvPr id="3" name="TextBox 2"/>
-          <p:cNvSpPr txBox="1"/>
-          <p:nvPr/>
-        </p:nvSpPr>
-        <p:spPr>
-          <a:xfrm>
-            <a:off x="731520" y="457200"/>
-            <a:ext cx="10698480" cy="365760"/>
-          </a:xfrm>
-          <a:prstGeom prst="rect">
-            <a:avLst/>
-          </a:prstGeom>
-          <a:noFill/>
-        </p:spPr>
-        <p:txBody>
-          <a:bodyPr wrap="square">
-            <a:spAutoFit/>
-          </a:bodyPr>
-          <a:lstStyle/>
-          <a:p>
-            <a:pPr>
-              <a:defRPr sz="1100" b="1">
-                <a:solidFill>
-                  <a:srgbClr val="38BDF8"/>
-                </a:solidFill>
-              </a:defRPr>
-            </a:pPr>
-            <a:r>
-              <a:t>OPSPULSE DEVSECOPS CAPSTONE</a:t>
-            </a:r>
-          </a:p>
-        </p:txBody>
-      </p:sp>
-      <p:sp>
-        <p:nvSpPr>
-          <p:cNvPr id="4" name="TextBox 3"/>
-          <p:cNvSpPr txBox="1"/>
-          <p:nvPr/>
-        </p:nvSpPr>
-        <p:spPr>
-          <a:xfrm>
-            <a:off x="731520" y="777240"/>
-            <a:ext cx="10698480" cy="731520"/>
-          </a:xfrm>
-          <a:prstGeom prst="rect">
-            <a:avLst/>
-          </a:prstGeom>
-          <a:noFill/>
-        </p:spPr>
-        <p:txBody>
-          <a:bodyPr wrap="square">
-            <a:spAutoFit/>
-          </a:bodyPr>
-          <a:lstStyle/>
-          <a:p>
-            <a:pPr>
-              <a:defRPr sz="2800" b="1">
-                <a:solidFill>
-                  <a:srgbClr val="F8FAFC"/>
-                </a:solidFill>
-              </a:defRPr>
-            </a:pPr>
-            <a:r>
-              <a:t>End-to-End System Architecture</a:t>
-            </a:r>
-          </a:p>
-        </p:txBody>
-      </p:sp>
-      <p:sp>
-        <p:nvSpPr>
-          <p:cNvPr id="5" name="Rounded Rectangle 4"/>
-          <p:cNvSpPr/>
-          <p:nvPr/>
-        </p:nvSpPr>
-        <p:spPr>
-          <a:xfrm>
-            <a:off x="731520" y="1645920"/>
-            <a:ext cx="10698480" cy="4572000"/>
-          </a:xfrm>
-          <a:prstGeom prst="roundRect">
-            <a:avLst/>
-          </a:prstGeom>
-          <a:solidFill>
-            <a:srgbClr val="1E293B"/>
-          </a:solidFill>
-          <a:ln>
-            <a:solidFill>
-              <a:srgbClr val="6366F1"/>
-            </a:solidFill>
-          </a:ln>
-        </p:spPr>
-        <p:style>
-          <a:lnRef idx="1">
-            <a:schemeClr val="accent1"/>
-          </a:lnRef>
-          <a:fillRef idx="3">
-            <a:schemeClr val="accent1"/>
-          </a:fillRef>
-          <a:effectRef idx="2">
-            <a:schemeClr val="accent1"/>
-          </a:effectRef>
-          <a:fontRef idx="minor">
-            <a:schemeClr val="lt1"/>
-          </a:fontRef>
-        </p:style>
-        <p:txBody>
-          <a:bodyPr rtlCol="0" anchor="ctr" wrap="square"/>
-          <a:lstStyle/>
-          <a:p>
-            <a:pPr algn="ctr">
-              <a:defRPr sz="1800" b="1">
-                <a:solidFill>
-                  <a:srgbClr val="38BDF8"/>
-                </a:solidFill>
-              </a:defRPr>
-            </a:pPr>
-            <a:r>
-              <a:t>System Dataflow &amp; Boundary Isolation</a:t>
-            </a:r>
-            <a:br/>
-          </a:p>
-          <a:p>
-            <a:pPr>
-              <a:defRPr sz="1200">
-                <a:solidFill>
-                  <a:srgbClr val="F8FAFC"/>
-                </a:solidFill>
-              </a:defRPr>
-            </a:pPr>
-            <a:r>
-              <a:t>1. Ingress Tier: External requests terminate at Nginx Ingress Controller (ELB) in public subnets. Host header routing sends /api &amp; /health to Backend Service and / to Frontend Service.</a:t>
-            </a:r>
-            <a:br/>
-          </a:p>
-          <a:p>
-            <a:pPr>
-              <a:defRPr sz="1200">
-                <a:solidFill>
-                  <a:srgbClr val="F8FAFC"/>
-                </a:solidFill>
-              </a:defRPr>
-            </a:pPr>
-            <a:r>
-              <a:t>2. Frontend Service: Nginx Alpine running unprivileged as UID 10001 serves optimized static React bundle and proxies local API calls.</a:t>
-            </a:r>
-            <a:br/>
-          </a:p>
-          <a:p>
-            <a:pPr>
-              <a:defRPr sz="1200">
-                <a:solidFill>
-                  <a:srgbClr val="F8FAFC"/>
-                </a:solidFill>
-              </a:defRPr>
-            </a:pPr>
-            <a:r>
-              <a:t>3. Backend API Tier: FastAPI running as UID 10001 in private worker nodes. Executes business logic, schema validation, and exposes /metrics for Prometheus.</a:t>
-            </a:r>
-            <a:br/>
-          </a:p>
-          <a:p>
-            <a:pPr>
-              <a:defRPr sz="1200">
-                <a:solidFill>
-                  <a:srgbClr val="F8FAFC"/>
-                </a:solidFill>
-              </a:defRPr>
-            </a:pPr>
-            <a:r>
-              <a:t>4. Persistence Tier: PostgreSQL 16 stateful layer running with PVC backed storage and Alembic database versioning.</a:t>
-            </a:r>
-            <a:br/>
-          </a:p>
-          <a:p>
-            <a:pPr>
-              <a:defRPr sz="1200">
-                <a:solidFill>
-                  <a:srgbClr val="F8FAFC"/>
-                </a:solidFill>
-              </a:defRPr>
-            </a:pPr>
-            <a:r>
-              <a:t>5. GitOps &amp; Observability: ArgoCD continuously syncs Helm charts from GitHub to EKS. Prometheus scrapes backend pods via ServiceMonitor every 15s; Grafana visualizes request rates, p95 latency, and error trends.</a:t>
-            </a:r>
-            <a:br/>
+          <p:cNvPr id="2" name="Title 1"/>
+          <p:cNvSpPr>
+            <a:spLocks noGrp="1"/>
+          </p:cNvSpPr>
+          <p:nvPr>
+            <p:ph type="title"/>
+          </p:nvPr>
+        </p:nvSpPr>
+        <p:spPr/>
+        <p:txBody>
+          <a:bodyPr/>
+          <a:lstStyle/>
+          <a:p>
+            <a:r>
+              <a:rPr>
+                <a:solidFill>
+                  <a:srgbClr val="1B6EC3"/>
+                </a:solidFill>
+              </a:rPr>
+              <a:t>4. System Architecture</a:t>
+            </a:r>
+          </a:p>
+        </p:txBody>
+      </p:sp>
+      <p:sp>
+        <p:nvSpPr>
+          <p:cNvPr id="3" name="Content Placeholder 2"/>
+          <p:cNvSpPr>
+            <a:spLocks noGrp="1"/>
+          </p:cNvSpPr>
+          <p:nvPr>
+            <p:ph idx="1"/>
+          </p:nvPr>
+        </p:nvSpPr>
+        <p:spPr/>
+        <p:txBody>
+          <a:bodyPr wrap="square"/>
+          <a:lstStyle/>
+          <a:p>
+            <a:pPr>
+              <a:spcAft>
+                <a:spcPts val="800"/>
+              </a:spcAft>
+              <a:defRPr sz="2000">
+                <a:solidFill>
+                  <a:srgbClr val="222222"/>
+                </a:solidFill>
+              </a:defRPr>
+            </a:pPr>
+            <a:r>
+              <a:t>Browsers &gt; AWS Load Balancer &gt; Nginx Ingress Controller.</a:t>
+            </a:r>
+          </a:p>
+          <a:p>
+            <a:pPr>
+              <a:spcAft>
+                <a:spcPts val="800"/>
+              </a:spcAft>
+              <a:defRPr sz="2000">
+                <a:solidFill>
+                  <a:srgbClr val="222222"/>
+                </a:solidFill>
+              </a:defRPr>
+            </a:pPr>
+            <a:r>
+              <a:t>Path / serves the React frontend (2 replicas, port 8080).</a:t>
+            </a:r>
+          </a:p>
+          <a:p>
+            <a:pPr>
+              <a:spcAft>
+                <a:spcPts val="800"/>
+              </a:spcAft>
+              <a:defRPr sz="2000">
+                <a:solidFill>
+                  <a:srgbClr val="222222"/>
+                </a:solidFill>
+              </a:defRPr>
+            </a:pPr>
+            <a:r>
+              <a:t>Paths /api, /health, /metrics route to the FastAPI backend (2 replicas, port 8000).</a:t>
+            </a:r>
+          </a:p>
+          <a:p>
+            <a:pPr>
+              <a:spcAft>
+                <a:spcPts val="800"/>
+              </a:spcAft>
+              <a:defRPr sz="2000">
+                <a:solidFill>
+                  <a:srgbClr val="222222"/>
+                </a:solidFill>
+              </a:defRPr>
+            </a:pPr>
+            <a:r>
+              <a:t>Backend persists to PostgreSQL 16 (classroom: in-cluster PVC; prod: Amazon RDS).</a:t>
+            </a:r>
+          </a:p>
+          <a:p>
+            <a:pPr>
+              <a:spcAft>
+                <a:spcPts val="800"/>
+              </a:spcAft>
+              <a:defRPr sz="2000">
+                <a:solidFill>
+                  <a:srgbClr val="222222"/>
+                </a:solidFill>
+              </a:defRPr>
+            </a:pPr>
+            <a:r>
+              <a:t>Prometheus scrapes /metrics; Grafana visualizes rate, latency, errors.</a:t>
+            </a:r>
+          </a:p>
+          <a:p>
+            <a:pPr>
+              <a:spcAft>
+                <a:spcPts val="800"/>
+              </a:spcAft>
+              <a:defRPr sz="2000">
+                <a:solidFill>
+                  <a:srgbClr val="222222"/>
+                </a:solidFill>
+              </a:defRPr>
+            </a:pPr>
+            <a:r>
+              <a:t>HPA scales 2-6 replicas at 60% CPU; ArgoCD reconciles Git desired state.</a:t>
+            </a:r>
           </a:p>
         </p:txBody>
       </p:sp>
@@ -4801,343 +4076,117 @@
       <p:grpSpPr/>
       <p:sp>
         <p:nvSpPr>
-          <p:cNvPr id="2" name="Rectangle 1"/>
-          <p:cNvSpPr/>
-          <p:nvPr/>
-        </p:nvSpPr>
-        <p:spPr>
-          <a:xfrm>
-            <a:off x="0" y="0"/>
-            <a:ext cx="12191695" cy="6858000"/>
-          </a:xfrm>
-          <a:prstGeom prst="rect">
-            <a:avLst/>
-          </a:prstGeom>
-          <a:solidFill>
-            <a:srgbClr val="0F172A"/>
-          </a:solidFill>
-          <a:ln>
-            <a:noFill/>
-          </a:ln>
-        </p:spPr>
-        <p:style>
-          <a:lnRef idx="1">
-            <a:schemeClr val="accent1"/>
-          </a:lnRef>
-          <a:fillRef idx="3">
-            <a:schemeClr val="accent1"/>
-          </a:fillRef>
-          <a:effectRef idx="2">
-            <a:schemeClr val="accent1"/>
-          </a:effectRef>
-          <a:fontRef idx="minor">
-            <a:schemeClr val="lt1"/>
-          </a:fontRef>
-        </p:style>
-        <p:txBody>
-          <a:bodyPr rtlCol="0" anchor="ctr"/>
-          <a:lstStyle/>
-          <a:p>
-            <a:pPr algn="ctr"/>
-          </a:p>
-        </p:txBody>
-      </p:sp>
-      <p:sp>
-        <p:nvSpPr>
-          <p:cNvPr id="3" name="TextBox 2"/>
-          <p:cNvSpPr txBox="1"/>
-          <p:nvPr/>
-        </p:nvSpPr>
-        <p:spPr>
-          <a:xfrm>
-            <a:off x="731520" y="457200"/>
-            <a:ext cx="10698480" cy="365760"/>
-          </a:xfrm>
-          <a:prstGeom prst="rect">
-            <a:avLst/>
-          </a:prstGeom>
-          <a:noFill/>
-        </p:spPr>
-        <p:txBody>
-          <a:bodyPr wrap="square">
-            <a:spAutoFit/>
-          </a:bodyPr>
-          <a:lstStyle/>
-          <a:p>
-            <a:pPr>
-              <a:defRPr sz="1100" b="1">
-                <a:solidFill>
-                  <a:srgbClr val="38BDF8"/>
-                </a:solidFill>
-              </a:defRPr>
-            </a:pPr>
-            <a:r>
-              <a:t>OPSPULSE DEVSECOPS CAPSTONE</a:t>
-            </a:r>
-          </a:p>
-        </p:txBody>
-      </p:sp>
-      <p:sp>
-        <p:nvSpPr>
-          <p:cNvPr id="4" name="TextBox 3"/>
-          <p:cNvSpPr txBox="1"/>
-          <p:nvPr/>
-        </p:nvSpPr>
-        <p:spPr>
-          <a:xfrm>
-            <a:off x="731520" y="777240"/>
-            <a:ext cx="10698480" cy="731520"/>
-          </a:xfrm>
-          <a:prstGeom prst="rect">
-            <a:avLst/>
-          </a:prstGeom>
-          <a:noFill/>
-        </p:spPr>
-        <p:txBody>
-          <a:bodyPr wrap="square">
-            <a:spAutoFit/>
-          </a:bodyPr>
-          <a:lstStyle/>
-          <a:p>
-            <a:pPr>
-              <a:defRPr sz="2800" b="1">
-                <a:solidFill>
-                  <a:srgbClr val="F8FAFC"/>
-                </a:solidFill>
-              </a:defRPr>
-            </a:pPr>
-            <a:r>
-              <a:t>Quality Gate 1: Automated Testing &amp; Validation</a:t>
-            </a:r>
-          </a:p>
-        </p:txBody>
-      </p:sp>
-      <p:sp>
-        <p:nvSpPr>
-          <p:cNvPr id="5" name="Rounded Rectangle 4"/>
-          <p:cNvSpPr/>
-          <p:nvPr/>
-        </p:nvSpPr>
-        <p:spPr>
-          <a:xfrm>
-            <a:off x="731520" y="1645920"/>
-            <a:ext cx="5120640" cy="4572000"/>
-          </a:xfrm>
-          <a:prstGeom prst="roundRect">
-            <a:avLst/>
-          </a:prstGeom>
-          <a:solidFill>
-            <a:srgbClr val="1E293B"/>
-          </a:solidFill>
-          <a:ln>
-            <a:solidFill>
-              <a:srgbClr val="6366F1"/>
-            </a:solidFill>
-          </a:ln>
-        </p:spPr>
-        <p:style>
-          <a:lnRef idx="1">
-            <a:schemeClr val="accent1"/>
-          </a:lnRef>
-          <a:fillRef idx="3">
-            <a:schemeClr val="accent1"/>
-          </a:fillRef>
-          <a:effectRef idx="2">
-            <a:schemeClr val="accent1"/>
-          </a:effectRef>
-          <a:fontRef idx="minor">
-            <a:schemeClr val="lt1"/>
-          </a:fontRef>
-        </p:style>
-        <p:txBody>
-          <a:bodyPr rtlCol="0" anchor="ctr" wrap="square"/>
-          <a:lstStyle/>
-          <a:p>
-            <a:pPr algn="ctr">
-              <a:defRPr sz="1800" b="1">
-                <a:solidFill>
-                  <a:srgbClr val="38BDF8"/>
-                </a:solidFill>
-              </a:defRPr>
-            </a:pPr>
-            <a:r>
-              <a:t>Pytest Suite (24 Test Cases Passing)</a:t>
-            </a:r>
-            <a:br/>
-          </a:p>
-          <a:p>
-            <a:pPr>
-              <a:defRPr sz="1200">
-                <a:solidFill>
-                  <a:srgbClr val="F8FAFC"/>
-                </a:solidFill>
-              </a:defRPr>
-            </a:pPr>
-            <a:r>
-              <a:t>• Health &amp; Readiness: Validates /health returns UP and /ready checks database connectivity.</a:t>
-            </a:r>
-          </a:p>
-          <a:p>
-            <a:pPr>
-              <a:defRPr sz="1200">
-                <a:solidFill>
-                  <a:srgbClr val="F8FAFC"/>
-                </a:solidFill>
-              </a:defRPr>
-            </a:pPr>
-            <a:r>
-              <a:t>• CRUD Deployments: Comprehensive tests for Create, Read, Update, Delete, and Status Transitions.</a:t>
-            </a:r>
-          </a:p>
-          <a:p>
-            <a:pPr>
-              <a:defRPr sz="1200">
-                <a:solidFill>
-                  <a:srgbClr val="F8FAFC"/>
-                </a:solidFill>
-              </a:defRPr>
-            </a:pPr>
-            <a:r>
-              <a:t>• Incident Lifecycle: Validates severity constraints (LOW/MED/HIGH/CRITICAL) and MTTR calculation.</a:t>
-            </a:r>
-          </a:p>
-          <a:p>
-            <a:pPr>
-              <a:defRPr sz="1200">
-                <a:solidFill>
-                  <a:srgbClr val="F8FAFC"/>
-                </a:solidFill>
-              </a:defRPr>
-            </a:pPr>
-            <a:r>
-              <a:t>• Pagination &amp; Filtering: Tests offset/limit queries and status query parameters.</a:t>
-            </a:r>
-          </a:p>
-          <a:p>
-            <a:pPr>
-              <a:defRPr sz="1200">
-                <a:solidFill>
-                  <a:srgbClr val="F8FAFC"/>
-                </a:solidFill>
-              </a:defRPr>
-            </a:pPr>
-            <a:r>
-              <a:t>• Prometheus Metrics: Validates /metrics outputs standard OpenMetrics text format.</a:t>
-            </a:r>
-          </a:p>
-          <a:p>
-            <a:pPr>
-              <a:defRPr sz="1200">
-                <a:solidFill>
-                  <a:srgbClr val="F8FAFC"/>
-                </a:solidFill>
-              </a:defRPr>
-            </a:pPr>
-            <a:r>
-              <a:t>• Test Isolation: Runs against isolated in-memory test database, preventing production corruption.</a:t>
-            </a:r>
-          </a:p>
-        </p:txBody>
-      </p:sp>
-      <p:sp>
-        <p:nvSpPr>
-          <p:cNvPr id="6" name="Rounded Rectangle 5"/>
-          <p:cNvSpPr/>
-          <p:nvPr/>
-        </p:nvSpPr>
-        <p:spPr>
-          <a:xfrm>
-            <a:off x="6217920" y="1645920"/>
-            <a:ext cx="5212080" cy="4572000"/>
-          </a:xfrm>
-          <a:prstGeom prst="roundRect">
-            <a:avLst/>
-          </a:prstGeom>
-          <a:solidFill>
-            <a:srgbClr val="1E293B"/>
-          </a:solidFill>
-          <a:ln>
-            <a:solidFill>
-              <a:srgbClr val="6366F1"/>
-            </a:solidFill>
-          </a:ln>
-        </p:spPr>
-        <p:style>
-          <a:lnRef idx="1">
-            <a:schemeClr val="accent1"/>
-          </a:lnRef>
-          <a:fillRef idx="3">
-            <a:schemeClr val="accent1"/>
-          </a:fillRef>
-          <a:effectRef idx="2">
-            <a:schemeClr val="accent1"/>
-          </a:effectRef>
-          <a:fontRef idx="minor">
-            <a:schemeClr val="lt1"/>
-          </a:fontRef>
-        </p:style>
-        <p:txBody>
-          <a:bodyPr rtlCol="0" anchor="ctr" wrap="square"/>
-          <a:lstStyle/>
-          <a:p>
-            <a:pPr algn="ctr">
-              <a:defRPr sz="1800" b="1">
-                <a:solidFill>
-                  <a:srgbClr val="38BDF8"/>
-                </a:solidFill>
-              </a:defRPr>
-            </a:pPr>
-            <a:r>
-              <a:t>Frontend Validation &amp; Schema Safety</a:t>
-            </a:r>
-            <a:br/>
-          </a:p>
-          <a:p>
-            <a:pPr>
-              <a:defRPr sz="1200">
-                <a:solidFill>
-                  <a:srgbClr val="F8FAFC"/>
-                </a:solidFill>
-              </a:defRPr>
-            </a:pPr>
-            <a:r>
-              <a:t>• Vite Production Build: Type-checked bundle compiled and minified with zero runtime warnings.</a:t>
-            </a:r>
-          </a:p>
-          <a:p>
-            <a:pPr>
-              <a:defRPr sz="1200">
-                <a:solidFill>
-                  <a:srgbClr val="F8FAFC"/>
-                </a:solidFill>
-              </a:defRPr>
-            </a:pPr>
-            <a:r>
-              <a:t>• Alembic Database Versioning: Migration scripts ensure idempotent schema evolution.</a:t>
-            </a:r>
-          </a:p>
-          <a:p>
-            <a:pPr>
-              <a:defRPr sz="1200">
-                <a:solidFill>
-                  <a:srgbClr val="F8FAFC"/>
-                </a:solidFill>
-              </a:defRPr>
-            </a:pPr>
-            <a:r>
-              <a:t>• Strict Pydantic V2 Schemas: All request/response payloads strictly typed and validated.</a:t>
-            </a:r>
-          </a:p>
-          <a:p>
-            <a:pPr>
-              <a:defRPr sz="1200">
-                <a:solidFill>
-                  <a:srgbClr val="F8FAFC"/>
-                </a:solidFill>
-              </a:defRPr>
-            </a:pPr>
-            <a:r>
-              <a:t>• Pre-commit Linting: Code formatted and validated prior to CI execution.</a:t>
+          <p:cNvPr id="2" name="Title 1"/>
+          <p:cNvSpPr>
+            <a:spLocks noGrp="1"/>
+          </p:cNvSpPr>
+          <p:nvPr>
+            <p:ph type="title"/>
+          </p:nvPr>
+        </p:nvSpPr>
+        <p:spPr/>
+        <p:txBody>
+          <a:bodyPr/>
+          <a:lstStyle/>
+          <a:p>
+            <a:r>
+              <a:rPr>
+                <a:solidFill>
+                  <a:srgbClr val="1B6EC3"/>
+                </a:solidFill>
+              </a:rPr>
+              <a:t>5. Testing &amp; CI/CD Pipeline</a:t>
+            </a:r>
+          </a:p>
+        </p:txBody>
+      </p:sp>
+      <p:sp>
+        <p:nvSpPr>
+          <p:cNvPr id="3" name="Content Placeholder 2"/>
+          <p:cNvSpPr>
+            <a:spLocks noGrp="1"/>
+          </p:cNvSpPr>
+          <p:nvPr>
+            <p:ph idx="1"/>
+          </p:nvPr>
+        </p:nvSpPr>
+        <p:spPr/>
+        <p:txBody>
+          <a:bodyPr wrap="square"/>
+          <a:lstStyle/>
+          <a:p>
+            <a:pPr>
+              <a:spcAft>
+                <a:spcPts val="800"/>
+              </a:spcAft>
+              <a:defRPr sz="2000">
+                <a:solidFill>
+                  <a:srgbClr val="222222"/>
+                </a:solidFill>
+              </a:defRPr>
+            </a:pPr>
+            <a:r>
+              <a:t>29 backend pytest tests (health, CRUD incl. PUT/PATCH, validation, 404s, pagination, stats, metrics) - all passing.</a:t>
+            </a:r>
+          </a:p>
+          <a:p>
+            <a:pPr>
+              <a:spcAft>
+                <a:spcPts val="800"/>
+              </a:spcAft>
+              <a:defRPr sz="2000">
+                <a:solidFill>
+                  <a:srgbClr val="222222"/>
+                </a:solidFill>
+              </a:defRPr>
+            </a:pPr>
+            <a:r>
+              <a:t>5 frontend smoke tests + production Vite build in the pipeline test job.</a:t>
+            </a:r>
+          </a:p>
+          <a:p>
+            <a:pPr>
+              <a:spcAft>
+                <a:spcPts val="800"/>
+              </a:spcAft>
+              <a:defRPr sz="2000">
+                <a:solidFill>
+                  <a:srgbClr val="222222"/>
+                </a:solidFill>
+              </a:defRPr>
+            </a:pPr>
+            <a:r>
+              <a:t>Failed tests block image build, scan, and publish - quality gate enforced.</a:t>
+            </a:r>
+          </a:p>
+          <a:p>
+            <a:pPr>
+              <a:spcAft>
+                <a:spcPts val="800"/>
+              </a:spcAft>
+              <a:defRPr sz="2000">
+                <a:solidFill>
+                  <a:srgbClr val="222222"/>
+                </a:solidFill>
+              </a:defRPr>
+            </a:pPr>
+            <a:r>
+              <a:t>Docker Buildx builds both images tagged with the Git commit SHA (traceable).</a:t>
+            </a:r>
+          </a:p>
+          <a:p>
+            <a:pPr>
+              <a:spcAft>
+                <a:spcPts val="800"/>
+              </a:spcAft>
+              <a:defRPr sz="2000">
+                <a:solidFill>
+                  <a:srgbClr val="222222"/>
+                </a:solidFill>
+              </a:defRPr>
+            </a:pPr>
+            <a:r>
+              <a:t>Deploy job verifies the release on an ephemeral Kubernetes cluster.</a:t>
             </a:r>
           </a:p>
         </p:txBody>
@@ -5162,319 +4211,117 @@
       <p:grpSpPr/>
       <p:sp>
         <p:nvSpPr>
-          <p:cNvPr id="2" name="Rectangle 1"/>
-          <p:cNvSpPr/>
-          <p:nvPr/>
-        </p:nvSpPr>
-        <p:spPr>
-          <a:xfrm>
-            <a:off x="0" y="0"/>
-            <a:ext cx="12191695" cy="6858000"/>
-          </a:xfrm>
-          <a:prstGeom prst="rect">
-            <a:avLst/>
-          </a:prstGeom>
-          <a:solidFill>
-            <a:srgbClr val="0F172A"/>
-          </a:solidFill>
-          <a:ln>
-            <a:noFill/>
-          </a:ln>
-        </p:spPr>
-        <p:style>
-          <a:lnRef idx="1">
-            <a:schemeClr val="accent1"/>
-          </a:lnRef>
-          <a:fillRef idx="3">
-            <a:schemeClr val="accent1"/>
-          </a:fillRef>
-          <a:effectRef idx="2">
-            <a:schemeClr val="accent1"/>
-          </a:effectRef>
-          <a:fontRef idx="minor">
-            <a:schemeClr val="lt1"/>
-          </a:fontRef>
-        </p:style>
-        <p:txBody>
-          <a:bodyPr rtlCol="0" anchor="ctr"/>
-          <a:lstStyle/>
-          <a:p>
-            <a:pPr algn="ctr"/>
-          </a:p>
-        </p:txBody>
-      </p:sp>
-      <p:sp>
-        <p:nvSpPr>
-          <p:cNvPr id="3" name="TextBox 2"/>
-          <p:cNvSpPr txBox="1"/>
-          <p:nvPr/>
-        </p:nvSpPr>
-        <p:spPr>
-          <a:xfrm>
-            <a:off x="731520" y="457200"/>
-            <a:ext cx="10698480" cy="365760"/>
-          </a:xfrm>
-          <a:prstGeom prst="rect">
-            <a:avLst/>
-          </a:prstGeom>
-          <a:noFill/>
-        </p:spPr>
-        <p:txBody>
-          <a:bodyPr wrap="square">
-            <a:spAutoFit/>
-          </a:bodyPr>
-          <a:lstStyle/>
-          <a:p>
-            <a:pPr>
-              <a:defRPr sz="1100" b="1">
-                <a:solidFill>
-                  <a:srgbClr val="38BDF8"/>
-                </a:solidFill>
-              </a:defRPr>
-            </a:pPr>
-            <a:r>
-              <a:t>OPSPULSE DEVSECOPS CAPSTONE</a:t>
-            </a:r>
-          </a:p>
-        </p:txBody>
-      </p:sp>
-      <p:sp>
-        <p:nvSpPr>
-          <p:cNvPr id="4" name="TextBox 3"/>
-          <p:cNvSpPr txBox="1"/>
-          <p:nvPr/>
-        </p:nvSpPr>
-        <p:spPr>
-          <a:xfrm>
-            <a:off x="731520" y="777240"/>
-            <a:ext cx="10698480" cy="731520"/>
-          </a:xfrm>
-          <a:prstGeom prst="rect">
-            <a:avLst/>
-          </a:prstGeom>
-          <a:noFill/>
-        </p:spPr>
-        <p:txBody>
-          <a:bodyPr wrap="square">
-            <a:spAutoFit/>
-          </a:bodyPr>
-          <a:lstStyle/>
-          <a:p>
-            <a:pPr>
-              <a:defRPr sz="2800" b="1">
-                <a:solidFill>
-                  <a:srgbClr val="F8FAFC"/>
-                </a:solidFill>
-              </a:defRPr>
-            </a:pPr>
-            <a:r>
-              <a:t>Quality Gate 2: DevSecOps &amp; Container Security</a:t>
-            </a:r>
-          </a:p>
-        </p:txBody>
-      </p:sp>
-      <p:sp>
-        <p:nvSpPr>
-          <p:cNvPr id="5" name="Rounded Rectangle 4"/>
-          <p:cNvSpPr/>
-          <p:nvPr/>
-        </p:nvSpPr>
-        <p:spPr>
-          <a:xfrm>
-            <a:off x="731520" y="1645920"/>
-            <a:ext cx="5120640" cy="4572000"/>
-          </a:xfrm>
-          <a:prstGeom prst="roundRect">
-            <a:avLst/>
-          </a:prstGeom>
-          <a:solidFill>
-            <a:srgbClr val="1E293B"/>
-          </a:solidFill>
-          <a:ln>
-            <a:solidFill>
-              <a:srgbClr val="6366F1"/>
-            </a:solidFill>
-          </a:ln>
-        </p:spPr>
-        <p:style>
-          <a:lnRef idx="1">
-            <a:schemeClr val="accent1"/>
-          </a:lnRef>
-          <a:fillRef idx="3">
-            <a:schemeClr val="accent1"/>
-          </a:fillRef>
-          <a:effectRef idx="2">
-            <a:schemeClr val="accent1"/>
-          </a:effectRef>
-          <a:fontRef idx="minor">
-            <a:schemeClr val="lt1"/>
-          </a:fontRef>
-        </p:style>
-        <p:txBody>
-          <a:bodyPr rtlCol="0" anchor="ctr" wrap="square"/>
-          <a:lstStyle/>
-          <a:p>
-            <a:pPr algn="ctr">
-              <a:defRPr sz="1800" b="1">
-                <a:solidFill>
-                  <a:srgbClr val="38BDF8"/>
-                </a:solidFill>
-              </a:defRPr>
-            </a:pPr>
-            <a:r>
-              <a:t>Trivy Vulnerability Scanner Gate</a:t>
-            </a:r>
-            <a:br/>
-          </a:p>
-          <a:p>
-            <a:pPr>
-              <a:defRPr sz="1200">
-                <a:solidFill>
-                  <a:srgbClr val="F8FAFC"/>
-                </a:solidFill>
-              </a:defRPr>
-            </a:pPr>
-            <a:r>
-              <a:t>• Automated Scan in Pipeline: Scans both backend and frontend images before registry push.</a:t>
-            </a:r>
-          </a:p>
-          <a:p>
-            <a:pPr>
-              <a:defRPr sz="1200">
-                <a:solidFill>
-                  <a:srgbClr val="F8FAFC"/>
-                </a:solidFill>
-              </a:defRPr>
-            </a:pPr>
-            <a:r>
-              <a:t>• Strict Exit Code Enforcement: --exit-code 1 fails pipeline build if HIGH or CRITICAL CVEs are detected.</a:t>
-            </a:r>
-          </a:p>
-          <a:p>
-            <a:pPr>
-              <a:defRPr sz="1200">
-                <a:solidFill>
-                  <a:srgbClr val="F8FAFC"/>
-                </a:solidFill>
-              </a:defRPr>
-            </a:pPr>
-            <a:r>
-              <a:t>• --ignore-unfixed Flag: Filters out actionable vendor patches, ensuring zero pipeline noise.</a:t>
-            </a:r>
-          </a:p>
-          <a:p>
-            <a:pPr>
-              <a:defRPr sz="1200">
-                <a:solidFill>
-                  <a:srgbClr val="F8FAFC"/>
-                </a:solidFill>
-              </a:defRPr>
-            </a:pPr>
-            <a:r>
-              <a:t>• Software Bill of Materials (SBOM): Generates auditable package inventory for all container layers.</a:t>
-            </a:r>
-          </a:p>
-        </p:txBody>
-      </p:sp>
-      <p:sp>
-        <p:nvSpPr>
-          <p:cNvPr id="6" name="Rounded Rectangle 5"/>
-          <p:cNvSpPr/>
-          <p:nvPr/>
-        </p:nvSpPr>
-        <p:spPr>
-          <a:xfrm>
-            <a:off x="6217920" y="1645920"/>
-            <a:ext cx="5212080" cy="4572000"/>
-          </a:xfrm>
-          <a:prstGeom prst="roundRect">
-            <a:avLst/>
-          </a:prstGeom>
-          <a:solidFill>
-            <a:srgbClr val="1E293B"/>
-          </a:solidFill>
-          <a:ln>
-            <a:solidFill>
-              <a:srgbClr val="6366F1"/>
-            </a:solidFill>
-          </a:ln>
-        </p:spPr>
-        <p:style>
-          <a:lnRef idx="1">
-            <a:schemeClr val="accent1"/>
-          </a:lnRef>
-          <a:fillRef idx="3">
-            <a:schemeClr val="accent1"/>
-          </a:fillRef>
-          <a:effectRef idx="2">
-            <a:schemeClr val="accent1"/>
-          </a:effectRef>
-          <a:fontRef idx="minor">
-            <a:schemeClr val="lt1"/>
-          </a:fontRef>
-        </p:style>
-        <p:txBody>
-          <a:bodyPr rtlCol="0" anchor="ctr" wrap="square"/>
-          <a:lstStyle/>
-          <a:p>
-            <a:pPr algn="ctr">
-              <a:defRPr sz="1800" b="1">
-                <a:solidFill>
-                  <a:srgbClr val="38BDF8"/>
-                </a:solidFill>
-              </a:defRPr>
-            </a:pPr>
-            <a:r>
-              <a:t>Container Hardening Best Practices</a:t>
-            </a:r>
-            <a:br/>
-          </a:p>
-          <a:p>
-            <a:pPr>
-              <a:defRPr sz="1200">
-                <a:solidFill>
-                  <a:srgbClr val="F8FAFC"/>
-                </a:solidFill>
-              </a:defRPr>
-            </a:pPr>
-            <a:r>
-              <a:t>• Non-Root User Enforcement: Both Dockerfiles enforce USER 10001 (appuser); no root privileges.</a:t>
-            </a:r>
-          </a:p>
-          <a:p>
-            <a:pPr>
-              <a:defRPr sz="1200">
-                <a:solidFill>
-                  <a:srgbClr val="F8FAFC"/>
-                </a:solidFill>
-              </a:defRPr>
-            </a:pPr>
-            <a:r>
-              <a:t>• Minimal Alpine &amp; Slim Base Images: Minimizes attack surface area (Node Alpine, Python Slim).</a:t>
-            </a:r>
-          </a:p>
-          <a:p>
-            <a:pPr>
-              <a:defRPr sz="1200">
-                <a:solidFill>
-                  <a:srgbClr val="F8FAFC"/>
-                </a:solidFill>
-              </a:defRPr>
-            </a:pPr>
-            <a:r>
-              <a:t>• Multi-Stage Build Pipeline: Strips build tooling, compiler libraries, and source files from runtime images.</a:t>
-            </a:r>
-          </a:p>
-          <a:p>
-            <a:pPr>
-              <a:defRPr sz="1200">
-                <a:solidFill>
-                  <a:srgbClr val="F8FAFC"/>
-                </a:solidFill>
-              </a:defRPr>
-            </a:pPr>
-            <a:r>
-              <a:t>• Zero Secrets Committed: Environment secrets injected via Kubernetes Secrets and GitHub Actions.</a:t>
+          <p:cNvPr id="2" name="Title 1"/>
+          <p:cNvSpPr>
+            <a:spLocks noGrp="1"/>
+          </p:cNvSpPr>
+          <p:nvPr>
+            <p:ph type="title"/>
+          </p:nvPr>
+        </p:nvSpPr>
+        <p:spPr/>
+        <p:txBody>
+          <a:bodyPr/>
+          <a:lstStyle/>
+          <a:p>
+            <a:r>
+              <a:rPr>
+                <a:solidFill>
+                  <a:srgbClr val="1B6EC3"/>
+                </a:solidFill>
+              </a:rPr>
+              <a:t>6. DevSecOps: Trivy Security Gates</a:t>
+            </a:r>
+          </a:p>
+        </p:txBody>
+      </p:sp>
+      <p:sp>
+        <p:nvSpPr>
+          <p:cNvPr id="3" name="Content Placeholder 2"/>
+          <p:cNvSpPr>
+            <a:spLocks noGrp="1"/>
+          </p:cNvSpPr>
+          <p:nvPr>
+            <p:ph idx="1"/>
+          </p:nvPr>
+        </p:nvSpPr>
+        <p:spPr/>
+        <p:txBody>
+          <a:bodyPr wrap="square"/>
+          <a:lstStyle/>
+          <a:p>
+            <a:pPr>
+              <a:spcAft>
+                <a:spcPts val="800"/>
+              </a:spcAft>
+              <a:defRPr sz="2000">
+                <a:solidFill>
+                  <a:srgbClr val="222222"/>
+                </a:solidFill>
+              </a:defRPr>
+            </a:pPr>
+            <a:r>
+              <a:t>Both images scanned with Trivy on every build: --severity HIGH,CRITICAL --exit-code 1.</a:t>
+            </a:r>
+          </a:p>
+          <a:p>
+            <a:pPr>
+              <a:spcAft>
+                <a:spcPts val="800"/>
+              </a:spcAft>
+              <a:defRPr sz="2000">
+                <a:solidFill>
+                  <a:srgbClr val="222222"/>
+                </a:solidFill>
+              </a:defRPr>
+            </a:pPr>
+            <a:r>
+              <a:t>Verified clean scan: 0 HIGH/CRITICAL findings (evidence in demo/evidence/).</a:t>
+            </a:r>
+          </a:p>
+          <a:p>
+            <a:pPr>
+              <a:spcAft>
+                <a:spcPts val="800"/>
+              </a:spcAft>
+              <a:defRPr sz="2000">
+                <a:solidFill>
+                  <a:srgbClr val="222222"/>
+                </a:solidFill>
+              </a:defRPr>
+            </a:pPr>
+            <a:r>
+              <a:t>Hardening: multi-stage builds, pip/curl removed from backend runtime, apk/apt upgrades.</a:t>
+            </a:r>
+          </a:p>
+          <a:p>
+            <a:pPr>
+              <a:spcAft>
+                <a:spcPts val="800"/>
+              </a:spcAft>
+              <a:defRPr sz="2000">
+                <a:solidFill>
+                  <a:srgbClr val="222222"/>
+                </a:solidFill>
+              </a:defRPr>
+            </a:pPr>
+            <a:r>
+              <a:t>Non-root UID 10001, K8s securityContext, resource limits, no committed secrets.</a:t>
+            </a:r>
+          </a:p>
+          <a:p>
+            <a:pPr>
+              <a:spcAft>
+                <a:spcPts val="800"/>
+              </a:spcAft>
+              <a:defRPr sz="2000">
+                <a:solidFill>
+                  <a:srgbClr val="222222"/>
+                </a:solidFill>
+              </a:defRPr>
+            </a:pPr>
+            <a:r>
+              <a:t>Pinned action SHAs, least-privilege GITHUB_TOKEN, SHA tags (never mutable latest for deploys).</a:t>
             </a:r>
           </a:p>
         </p:txBody>
@@ -5499,220 +4346,133 @@
       <p:grpSpPr/>
       <p:sp>
         <p:nvSpPr>
-          <p:cNvPr id="2" name="Rectangle 1"/>
-          <p:cNvSpPr/>
-          <p:nvPr/>
-        </p:nvSpPr>
-        <p:spPr>
-          <a:xfrm>
-            <a:off x="0" y="0"/>
-            <a:ext cx="12191695" cy="6858000"/>
-          </a:xfrm>
-          <a:prstGeom prst="rect">
-            <a:avLst/>
-          </a:prstGeom>
-          <a:solidFill>
-            <a:srgbClr val="0F172A"/>
-          </a:solidFill>
-          <a:ln>
-            <a:noFill/>
-          </a:ln>
-        </p:spPr>
-        <p:style>
-          <a:lnRef idx="1">
-            <a:schemeClr val="accent1"/>
-          </a:lnRef>
-          <a:fillRef idx="3">
-            <a:schemeClr val="accent1"/>
-          </a:fillRef>
-          <a:effectRef idx="2">
-            <a:schemeClr val="accent1"/>
-          </a:effectRef>
-          <a:fontRef idx="minor">
-            <a:schemeClr val="lt1"/>
-          </a:fontRef>
-        </p:style>
-        <p:txBody>
-          <a:bodyPr rtlCol="0" anchor="ctr"/>
-          <a:lstStyle/>
-          <a:p>
-            <a:pPr algn="ctr"/>
-          </a:p>
-        </p:txBody>
-      </p:sp>
-      <p:sp>
-        <p:nvSpPr>
-          <p:cNvPr id="3" name="TextBox 2"/>
-          <p:cNvSpPr txBox="1"/>
-          <p:nvPr/>
-        </p:nvSpPr>
-        <p:spPr>
-          <a:xfrm>
-            <a:off x="731520" y="457200"/>
-            <a:ext cx="10698480" cy="365760"/>
-          </a:xfrm>
-          <a:prstGeom prst="rect">
-            <a:avLst/>
-          </a:prstGeom>
-          <a:noFill/>
-        </p:spPr>
-        <p:txBody>
-          <a:bodyPr wrap="square">
-            <a:spAutoFit/>
-          </a:bodyPr>
-          <a:lstStyle/>
-          <a:p>
-            <a:pPr>
-              <a:defRPr sz="1100" b="1">
-                <a:solidFill>
-                  <a:srgbClr val="38BDF8"/>
-                </a:solidFill>
-              </a:defRPr>
-            </a:pPr>
-            <a:r>
-              <a:t>OPSPULSE DEVSECOPS CAPSTONE</a:t>
-            </a:r>
-          </a:p>
-        </p:txBody>
-      </p:sp>
-      <p:sp>
-        <p:nvSpPr>
-          <p:cNvPr id="4" name="TextBox 3"/>
-          <p:cNvSpPr txBox="1"/>
-          <p:nvPr/>
-        </p:nvSpPr>
-        <p:spPr>
-          <a:xfrm>
-            <a:off x="731520" y="777240"/>
-            <a:ext cx="10698480" cy="731520"/>
-          </a:xfrm>
-          <a:prstGeom prst="rect">
-            <a:avLst/>
-          </a:prstGeom>
-          <a:noFill/>
-        </p:spPr>
-        <p:txBody>
-          <a:bodyPr wrap="square">
-            <a:spAutoFit/>
-          </a:bodyPr>
-          <a:lstStyle/>
-          <a:p>
-            <a:pPr>
-              <a:defRPr sz="2800" b="1">
-                <a:solidFill>
-                  <a:srgbClr val="F8FAFC"/>
-                </a:solidFill>
-              </a:defRPr>
-            </a:pPr>
-            <a:r>
-              <a:t>Automated GitHub Actions CI/CD Pipeline</a:t>
-            </a:r>
-          </a:p>
-        </p:txBody>
-      </p:sp>
-      <p:sp>
-        <p:nvSpPr>
-          <p:cNvPr id="5" name="Rounded Rectangle 4"/>
-          <p:cNvSpPr/>
-          <p:nvPr/>
-        </p:nvSpPr>
-        <p:spPr>
-          <a:xfrm>
-            <a:off x="731520" y="1645920"/>
-            <a:ext cx="10698480" cy="4572000"/>
-          </a:xfrm>
-          <a:prstGeom prst="roundRect">
-            <a:avLst/>
-          </a:prstGeom>
-          <a:solidFill>
-            <a:srgbClr val="1E293B"/>
-          </a:solidFill>
-          <a:ln>
-            <a:solidFill>
-              <a:srgbClr val="6366F1"/>
-            </a:solidFill>
-          </a:ln>
-        </p:spPr>
-        <p:style>
-          <a:lnRef idx="1">
-            <a:schemeClr val="accent1"/>
-          </a:lnRef>
-          <a:fillRef idx="3">
-            <a:schemeClr val="accent1"/>
-          </a:fillRef>
-          <a:effectRef idx="2">
-            <a:schemeClr val="accent1"/>
-          </a:effectRef>
-          <a:fontRef idx="minor">
-            <a:schemeClr val="lt1"/>
-          </a:fontRef>
-        </p:style>
-        <p:txBody>
-          <a:bodyPr rtlCol="0" anchor="ctr" wrap="square"/>
-          <a:lstStyle/>
-          <a:p>
-            <a:pPr algn="ctr">
-              <a:defRPr sz="1800" b="1">
-                <a:solidFill>
-                  <a:srgbClr val="38BDF8"/>
-                </a:solidFill>
-              </a:defRPr>
-            </a:pPr>
-            <a:r>
-              <a:t>Three-Stage Enterprise Delivery Pipeline</a:t>
-            </a:r>
-            <a:br/>
-          </a:p>
-          <a:p>
-            <a:pPr>
-              <a:defRPr sz="1200">
-                <a:solidFill>
-                  <a:srgbClr val="F8FAFC"/>
-                </a:solidFill>
-              </a:defRPr>
-            </a:pPr>
-            <a:r>
-              <a:t>Stage 1: Test &amp; Quality Gate</a:t>
-            </a:r>
-            <a:br/>
-            <a:r>
-              <a:t>Triggered on push/PR to main. Checks out repository, executes 24 Pytest tests against Python 3.12, installs frontend dependencies, and verifies clean Vite build.</a:t>
-            </a:r>
-            <a:br/>
-          </a:p>
-          <a:p>
-            <a:pPr>
-              <a:defRPr sz="1200">
-                <a:solidFill>
-                  <a:srgbClr val="F8FAFC"/>
-                </a:solidFill>
-              </a:defRPr>
-            </a:pPr>
-            <a:r>
-              <a:t>Stage 2: Build, Scan &amp; GHCR Publish</a:t>
-            </a:r>
-            <a:br/>
-            <a:r>
-              <a:t>Builds multi-stage Docker images. Runs Trivy vulnerability scans on both images with exit-code 1. On success, publishes images to GitHub Container Registry (GHCR) using Git SHA tags.</a:t>
-            </a:r>
-            <a:br/>
-          </a:p>
-          <a:p>
-            <a:pPr>
-              <a:defRPr sz="1200">
-                <a:solidFill>
-                  <a:srgbClr val="F8FAFC"/>
-                </a:solidFill>
-              </a:defRPr>
-            </a:pPr>
-            <a:r>
-              <a:t>Stage 3: End-to-End Cluster Deploy &amp; Health Verification</a:t>
-            </a:r>
-            <a:br/>
-            <a:r>
-              <a:t>Spins up automated KinD Kubernetes cluster in CI runner, applies namespace and manifests, verifies readiness probes, and executes live curl verification of /health and /metrics.</a:t>
-            </a:r>
-            <a:br/>
+          <p:cNvPr id="2" name="Title 1"/>
+          <p:cNvSpPr>
+            <a:spLocks noGrp="1"/>
+          </p:cNvSpPr>
+          <p:nvPr>
+            <p:ph type="title"/>
+          </p:nvPr>
+        </p:nvSpPr>
+        <p:spPr/>
+        <p:txBody>
+          <a:bodyPr/>
+          <a:lstStyle/>
+          <a:p>
+            <a:r>
+              <a:rPr>
+                <a:solidFill>
+                  <a:srgbClr val="1B6EC3"/>
+                </a:solidFill>
+              </a:rPr>
+              <a:t>7. Terraform: AWS VPC + EKS</a:t>
+            </a:r>
+          </a:p>
+        </p:txBody>
+      </p:sp>
+      <p:sp>
+        <p:nvSpPr>
+          <p:cNvPr id="3" name="Content Placeholder 2"/>
+          <p:cNvSpPr>
+            <a:spLocks noGrp="1"/>
+          </p:cNvSpPr>
+          <p:nvPr>
+            <p:ph idx="1"/>
+          </p:nvPr>
+        </p:nvSpPr>
+        <p:spPr/>
+        <p:txBody>
+          <a:bodyPr wrap="square"/>
+          <a:lstStyle/>
+          <a:p>
+            <a:pPr>
+              <a:spcAft>
+                <a:spcPts val="800"/>
+              </a:spcAft>
+              <a:defRPr sz="2000">
+                <a:solidFill>
+                  <a:srgbClr val="222222"/>
+                </a:solidFill>
+              </a:defRPr>
+            </a:pPr>
+            <a:r>
+              <a:t>Region ap-south-1; terraform fmt + validate pass; remote-state-safe layout.</a:t>
+            </a:r>
+          </a:p>
+          <a:p>
+            <a:pPr>
+              <a:spcAft>
+                <a:spcPts val="800"/>
+              </a:spcAft>
+              <a:defRPr sz="2000">
+                <a:solidFill>
+                  <a:srgbClr val="222222"/>
+                </a:solidFill>
+              </a:defRPr>
+            </a:pPr>
+            <a:r>
+              <a:t>VPC 10.20.0.0/16: 2 public subnets (load balancers) + 2 private subnets (nodes).</a:t>
+            </a:r>
+          </a:p>
+          <a:p>
+            <a:pPr>
+              <a:spcAft>
+                <a:spcPts val="800"/>
+              </a:spcAft>
+              <a:defRPr sz="2000">
+                <a:solidFill>
+                  <a:srgbClr val="222222"/>
+                </a:solidFill>
+              </a:defRPr>
+            </a:pPr>
+            <a:r>
+              <a:t>EKS 1.31 with managed node group (t3.medium, min 2 / max 4 / desired 2).</a:t>
+            </a:r>
+          </a:p>
+          <a:p>
+            <a:pPr>
+              <a:spcAft>
+                <a:spcPts val="800"/>
+              </a:spcAft>
+              <a:defRPr sz="2000">
+                <a:solidFill>
+                  <a:srgbClr val="222222"/>
+                </a:solidFill>
+              </a:defRPr>
+            </a:pPr>
+            <a:r>
+              <a:t>terraform.tfvars.example ships with zero secrets; state files git-ignored.</a:t>
+            </a:r>
+          </a:p>
+          <a:p>
+            <a:pPr>
+              <a:spcAft>
+                <a:spcPts val="800"/>
+              </a:spcAft>
+              <a:defRPr sz="2000">
+                <a:solidFill>
+                  <a:srgbClr val="222222"/>
+                </a:solidFill>
+              </a:defRPr>
+            </a:pPr>
+            <a:r>
+              <a:t>Cost estimate ~$70-120/mo for demo period; documented destroy checklist.</a:t>
+            </a:r>
+          </a:p>
+          <a:p>
+            <a:pPr>
+              <a:spcAft>
+                <a:spcPts val="800"/>
+              </a:spcAft>
+              <a:defRPr sz="2000">
+                <a:solidFill>
+                  <a:srgbClr val="222222"/>
+                </a:solidFill>
+              </a:defRPr>
+            </a:pPr>
+            <a:r>
+              <a:t>BLOCKED without credentials: apply/destroy + console evidence need AWS keys.</a:t>
+            </a:r>
           </a:p>
         </p:txBody>
       </p:sp>
@@ -5736,331 +4496,117 @@
       <p:grpSpPr/>
       <p:sp>
         <p:nvSpPr>
-          <p:cNvPr id="2" name="Rectangle 1"/>
-          <p:cNvSpPr/>
-          <p:nvPr/>
-        </p:nvSpPr>
-        <p:spPr>
-          <a:xfrm>
-            <a:off x="0" y="0"/>
-            <a:ext cx="12191695" cy="6858000"/>
-          </a:xfrm>
-          <a:prstGeom prst="rect">
-            <a:avLst/>
-          </a:prstGeom>
-          <a:solidFill>
-            <a:srgbClr val="0F172A"/>
-          </a:solidFill>
-          <a:ln>
-            <a:noFill/>
-          </a:ln>
-        </p:spPr>
-        <p:style>
-          <a:lnRef idx="1">
-            <a:schemeClr val="accent1"/>
-          </a:lnRef>
-          <a:fillRef idx="3">
-            <a:schemeClr val="accent1"/>
-          </a:fillRef>
-          <a:effectRef idx="2">
-            <a:schemeClr val="accent1"/>
-          </a:effectRef>
-          <a:fontRef idx="minor">
-            <a:schemeClr val="lt1"/>
-          </a:fontRef>
-        </p:style>
-        <p:txBody>
-          <a:bodyPr rtlCol="0" anchor="ctr"/>
-          <a:lstStyle/>
-          <a:p>
-            <a:pPr algn="ctr"/>
-          </a:p>
-        </p:txBody>
-      </p:sp>
-      <p:sp>
-        <p:nvSpPr>
-          <p:cNvPr id="3" name="TextBox 2"/>
-          <p:cNvSpPr txBox="1"/>
-          <p:nvPr/>
-        </p:nvSpPr>
-        <p:spPr>
-          <a:xfrm>
-            <a:off x="731520" y="457200"/>
-            <a:ext cx="10698480" cy="365760"/>
-          </a:xfrm>
-          <a:prstGeom prst="rect">
-            <a:avLst/>
-          </a:prstGeom>
-          <a:noFill/>
-        </p:spPr>
-        <p:txBody>
-          <a:bodyPr wrap="square">
-            <a:spAutoFit/>
-          </a:bodyPr>
-          <a:lstStyle/>
-          <a:p>
-            <a:pPr>
-              <a:defRPr sz="1100" b="1">
-                <a:solidFill>
-                  <a:srgbClr val="38BDF8"/>
-                </a:solidFill>
-              </a:defRPr>
-            </a:pPr>
-            <a:r>
-              <a:t>OPSPULSE DEVSECOPS CAPSTONE</a:t>
-            </a:r>
-          </a:p>
-        </p:txBody>
-      </p:sp>
-      <p:sp>
-        <p:nvSpPr>
-          <p:cNvPr id="4" name="TextBox 3"/>
-          <p:cNvSpPr txBox="1"/>
-          <p:nvPr/>
-        </p:nvSpPr>
-        <p:spPr>
-          <a:xfrm>
-            <a:off x="731520" y="777240"/>
-            <a:ext cx="10698480" cy="731520"/>
-          </a:xfrm>
-          <a:prstGeom prst="rect">
-            <a:avLst/>
-          </a:prstGeom>
-          <a:noFill/>
-        </p:spPr>
-        <p:txBody>
-          <a:bodyPr wrap="square">
-            <a:spAutoFit/>
-          </a:bodyPr>
-          <a:lstStyle/>
-          <a:p>
-            <a:pPr>
-              <a:defRPr sz="2800" b="1">
-                <a:solidFill>
-                  <a:srgbClr val="F8FAFC"/>
-                </a:solidFill>
-              </a:defRPr>
-            </a:pPr>
-            <a:r>
-              <a:t>Infrastructure as Code: Terraform AWS VPC + EKS</a:t>
-            </a:r>
-          </a:p>
-        </p:txBody>
-      </p:sp>
-      <p:sp>
-        <p:nvSpPr>
-          <p:cNvPr id="5" name="Rounded Rectangle 4"/>
-          <p:cNvSpPr/>
-          <p:nvPr/>
-        </p:nvSpPr>
-        <p:spPr>
-          <a:xfrm>
-            <a:off x="731520" y="1645920"/>
-            <a:ext cx="5120640" cy="4572000"/>
-          </a:xfrm>
-          <a:prstGeom prst="roundRect">
-            <a:avLst/>
-          </a:prstGeom>
-          <a:solidFill>
-            <a:srgbClr val="1E293B"/>
-          </a:solidFill>
-          <a:ln>
-            <a:solidFill>
-              <a:srgbClr val="6366F1"/>
-            </a:solidFill>
-          </a:ln>
-        </p:spPr>
-        <p:style>
-          <a:lnRef idx="1">
-            <a:schemeClr val="accent1"/>
-          </a:lnRef>
-          <a:fillRef idx="3">
-            <a:schemeClr val="accent1"/>
-          </a:fillRef>
-          <a:effectRef idx="2">
-            <a:schemeClr val="accent1"/>
-          </a:effectRef>
-          <a:fontRef idx="minor">
-            <a:schemeClr val="lt1"/>
-          </a:fontRef>
-        </p:style>
-        <p:txBody>
-          <a:bodyPr rtlCol="0" anchor="ctr" wrap="square"/>
-          <a:lstStyle/>
-          <a:p>
-            <a:pPr algn="ctr">
-              <a:defRPr sz="1800" b="1">
-                <a:solidFill>
-                  <a:srgbClr val="38BDF8"/>
-                </a:solidFill>
-              </a:defRPr>
-            </a:pPr>
-            <a:r>
-              <a:t>Terraform IaC Architecture</a:t>
-            </a:r>
-            <a:br/>
-          </a:p>
-          <a:p>
-            <a:pPr>
-              <a:defRPr sz="1200">
-                <a:solidFill>
-                  <a:srgbClr val="F8FAFC"/>
-                </a:solidFill>
-              </a:defRPr>
-            </a:pPr>
-            <a:r>
-              <a:t>• VPC Module: Dedicated 10.20.0.0/16 network in ap-south-1 across 2 Availability Zones.</a:t>
-            </a:r>
-          </a:p>
-          <a:p>
-            <a:pPr>
-              <a:defRPr sz="1200">
-                <a:solidFill>
-                  <a:srgbClr val="F8FAFC"/>
-                </a:solidFill>
-              </a:defRPr>
-            </a:pPr>
-            <a:r>
-              <a:t>• Subnet Segregation: 2 Public subnets for load balancers (ELB), 2 Private subnets for compute.</a:t>
-            </a:r>
-          </a:p>
-          <a:p>
-            <a:pPr>
-              <a:defRPr sz="1200">
-                <a:solidFill>
-                  <a:srgbClr val="F8FAFC"/>
-                </a:solidFill>
-              </a:defRPr>
-            </a:pPr>
-            <a:r>
-              <a:t>• NAT Gateway: Outbound internet connectivity for private nodes without exposing ingress.</a:t>
-            </a:r>
-          </a:p>
-          <a:p>
-            <a:pPr>
-              <a:defRPr sz="1200">
-                <a:solidFill>
-                  <a:srgbClr val="F8FAFC"/>
-                </a:solidFill>
-              </a:defRPr>
-            </a:pPr>
-            <a:r>
-              <a:t>• EKS Cluster: Kubernetes v1.31 control plane with OIDC provider and KMS envelope encryption.</a:t>
-            </a:r>
-          </a:p>
-          <a:p>
-            <a:pPr>
-              <a:defRPr sz="1200">
-                <a:solidFill>
-                  <a:srgbClr val="F8FAFC"/>
-                </a:solidFill>
-              </a:defRPr>
-            </a:pPr>
-            <a:r>
-              <a:t>• Managed Node Groups: Auto-scaling worker group (t3.medium, min 2, max 4, desired 2 nodes).</a:t>
-            </a:r>
-          </a:p>
-        </p:txBody>
-      </p:sp>
-      <p:sp>
-        <p:nvSpPr>
-          <p:cNvPr id="6" name="Rounded Rectangle 5"/>
-          <p:cNvSpPr/>
-          <p:nvPr/>
-        </p:nvSpPr>
-        <p:spPr>
-          <a:xfrm>
-            <a:off x="6217920" y="1645920"/>
-            <a:ext cx="5212080" cy="4572000"/>
-          </a:xfrm>
-          <a:prstGeom prst="roundRect">
-            <a:avLst/>
-          </a:prstGeom>
-          <a:solidFill>
-            <a:srgbClr val="1E293B"/>
-          </a:solidFill>
-          <a:ln>
-            <a:solidFill>
-              <a:srgbClr val="6366F1"/>
-            </a:solidFill>
-          </a:ln>
-        </p:spPr>
-        <p:style>
-          <a:lnRef idx="1">
-            <a:schemeClr val="accent1"/>
-          </a:lnRef>
-          <a:fillRef idx="3">
-            <a:schemeClr val="accent1"/>
-          </a:fillRef>
-          <a:effectRef idx="2">
-            <a:schemeClr val="accent1"/>
-          </a:effectRef>
-          <a:fontRef idx="minor">
-            <a:schemeClr val="lt1"/>
-          </a:fontRef>
-        </p:style>
-        <p:txBody>
-          <a:bodyPr rtlCol="0" anchor="ctr" wrap="square"/>
-          <a:lstStyle/>
-          <a:p>
-            <a:pPr algn="ctr">
-              <a:defRPr sz="1800" b="1">
-                <a:solidFill>
-                  <a:srgbClr val="38BDF8"/>
-                </a:solidFill>
-              </a:defRPr>
-            </a:pPr>
-            <a:r>
-              <a:t>IaC Best Practices &amp; Lifecycle Management</a:t>
-            </a:r>
-            <a:br/>
-          </a:p>
-          <a:p>
-            <a:pPr>
-              <a:defRPr sz="1200">
-                <a:solidFill>
-                  <a:srgbClr val="F8FAFC"/>
-                </a:solidFill>
-              </a:defRPr>
-            </a:pPr>
-            <a:r>
-              <a:t>• Variable Validation: Strict regex pattern matching for AWS regions and environment enums.</a:t>
-            </a:r>
-          </a:p>
-          <a:p>
-            <a:pPr>
-              <a:defRPr sz="1200">
-                <a:solidFill>
-                  <a:srgbClr val="F8FAFC"/>
-                </a:solidFill>
-              </a:defRPr>
-            </a:pPr>
-            <a:r>
-              <a:t>• terraform.tfvars.example: Zero credentials committed to git; safe parameter template.</a:t>
-            </a:r>
-          </a:p>
-          <a:p>
-            <a:pPr>
-              <a:defRPr sz="1200">
-                <a:solidFill>
-                  <a:srgbClr val="F8FAFC"/>
-                </a:solidFill>
-              </a:defRPr>
-            </a:pPr>
-            <a:r>
-              <a:t>• terraform fmt &amp; validate: Clean, standardized HCL code passing automated syntax checks.</a:t>
-            </a:r>
-          </a:p>
-          <a:p>
-            <a:pPr>
-              <a:defRPr sz="1200">
-                <a:solidFill>
-                  <a:srgbClr val="F8FAFC"/>
-                </a:solidFill>
-              </a:defRPr>
-            </a:pPr>
-            <a:r>
-              <a:t>• Cost Discipline: Automated teardown process via terraform destroy prevents runaway cloud costs.</a:t>
+          <p:cNvPr id="2" name="Title 1"/>
+          <p:cNvSpPr>
+            <a:spLocks noGrp="1"/>
+          </p:cNvSpPr>
+          <p:nvPr>
+            <p:ph type="title"/>
+          </p:nvPr>
+        </p:nvSpPr>
+        <p:spPr/>
+        <p:txBody>
+          <a:bodyPr/>
+          <a:lstStyle/>
+          <a:p>
+            <a:r>
+              <a:rPr>
+                <a:solidFill>
+                  <a:srgbClr val="1B6EC3"/>
+                </a:solidFill>
+              </a:rPr>
+              <a:t>8. Kubernetes, Helm &amp; GitOps</a:t>
+            </a:r>
+          </a:p>
+        </p:txBody>
+      </p:sp>
+      <p:sp>
+        <p:nvSpPr>
+          <p:cNvPr id="3" name="Content Placeholder 2"/>
+          <p:cNvSpPr>
+            <a:spLocks noGrp="1"/>
+          </p:cNvSpPr>
+          <p:nvPr>
+            <p:ph idx="1"/>
+          </p:nvPr>
+        </p:nvSpPr>
+        <p:spPr/>
+        <p:txBody>
+          <a:bodyPr wrap="square"/>
+          <a:lstStyle/>
+          <a:p>
+            <a:pPr>
+              <a:spcAft>
+                <a:spcPts val="800"/>
+              </a:spcAft>
+              <a:defRPr sz="2000">
+                <a:solidFill>
+                  <a:srgbClr val="222222"/>
+                </a:solidFill>
+              </a:defRPr>
+            </a:pPr>
+            <a:r>
+              <a:t>Helm chart helm/opspulse: lint-clean, renders 11 resources (deployments, services, ingress, HPA, postgres, secret, PVC).</a:t>
+            </a:r>
+          </a:p>
+          <a:p>
+            <a:pPr>
+              <a:spcAft>
+                <a:spcPts val="800"/>
+              </a:spcAft>
+              <a:defRPr sz="2000">
+                <a:solidFill>
+                  <a:srgbClr val="222222"/>
+                </a:solidFill>
+              </a:defRPr>
+            </a:pPr>
+            <a:r>
+              <a:t>2 replicas each; ClusterIP services; ingress routes / to frontend and /api to backend.</a:t>
+            </a:r>
+          </a:p>
+          <a:p>
+            <a:pPr>
+              <a:spcAft>
+                <a:spcPts val="800"/>
+              </a:spcAft>
+              <a:defRPr sz="2000">
+                <a:solidFill>
+                  <a:srgbClr val="222222"/>
+                </a:solidFill>
+              </a:defRPr>
+            </a:pPr>
+            <a:r>
+              <a:t>HPA proven live on kind: 2 &gt; 6 replicas under load, scaled back to 2 after.</a:t>
+            </a:r>
+          </a:p>
+          <a:p>
+            <a:pPr>
+              <a:spcAft>
+                <a:spcPts val="800"/>
+              </a:spcAft>
+              <a:defRPr sz="2000">
+                <a:solidFill>
+                  <a:srgbClr val="222222"/>
+                </a:solidFill>
+              </a:defRPr>
+            </a:pPr>
+            <a:r>
+              <a:t>ArgoCD Application proven Synced + Healthy; auto-detects Git commits.</a:t>
+            </a:r>
+          </a:p>
+          <a:p>
+            <a:pPr>
+              <a:spcAft>
+                <a:spcPts val="800"/>
+              </a:spcAft>
+              <a:defRPr sz="2000">
+                <a:solidFill>
+                  <a:srgbClr val="222222"/>
+                </a:solidFill>
+              </a:defRPr>
+            </a:pPr>
+            <a:r>
+              <a:t>Real fixes from live runs: BACKEND_HOST env (nginx portability), wait-for-db initContainer, HPA ignoreDifferences.</a:t>
             </a:r>
           </a:p>
         </p:txBody>
@@ -6085,331 +4631,117 @@
       <p:grpSpPr/>
       <p:sp>
         <p:nvSpPr>
-          <p:cNvPr id="2" name="Rectangle 1"/>
-          <p:cNvSpPr/>
-          <p:nvPr/>
-        </p:nvSpPr>
-        <p:spPr>
-          <a:xfrm>
-            <a:off x="0" y="0"/>
-            <a:ext cx="12191695" cy="6858000"/>
-          </a:xfrm>
-          <a:prstGeom prst="rect">
-            <a:avLst/>
-          </a:prstGeom>
-          <a:solidFill>
-            <a:srgbClr val="0F172A"/>
-          </a:solidFill>
-          <a:ln>
-            <a:noFill/>
-          </a:ln>
-        </p:spPr>
-        <p:style>
-          <a:lnRef idx="1">
-            <a:schemeClr val="accent1"/>
-          </a:lnRef>
-          <a:fillRef idx="3">
-            <a:schemeClr val="accent1"/>
-          </a:fillRef>
-          <a:effectRef idx="2">
-            <a:schemeClr val="accent1"/>
-          </a:effectRef>
-          <a:fontRef idx="minor">
-            <a:schemeClr val="lt1"/>
-          </a:fontRef>
-        </p:style>
-        <p:txBody>
-          <a:bodyPr rtlCol="0" anchor="ctr"/>
-          <a:lstStyle/>
-          <a:p>
-            <a:pPr algn="ctr"/>
-          </a:p>
-        </p:txBody>
-      </p:sp>
-      <p:sp>
-        <p:nvSpPr>
-          <p:cNvPr id="3" name="TextBox 2"/>
-          <p:cNvSpPr txBox="1"/>
-          <p:nvPr/>
-        </p:nvSpPr>
-        <p:spPr>
-          <a:xfrm>
-            <a:off x="731520" y="457200"/>
-            <a:ext cx="10698480" cy="365760"/>
-          </a:xfrm>
-          <a:prstGeom prst="rect">
-            <a:avLst/>
-          </a:prstGeom>
-          <a:noFill/>
-        </p:spPr>
-        <p:txBody>
-          <a:bodyPr wrap="square">
-            <a:spAutoFit/>
-          </a:bodyPr>
-          <a:lstStyle/>
-          <a:p>
-            <a:pPr>
-              <a:defRPr sz="1100" b="1">
-                <a:solidFill>
-                  <a:srgbClr val="38BDF8"/>
-                </a:solidFill>
-              </a:defRPr>
-            </a:pPr>
-            <a:r>
-              <a:t>OPSPULSE DEVSECOPS CAPSTONE</a:t>
-            </a:r>
-          </a:p>
-        </p:txBody>
-      </p:sp>
-      <p:sp>
-        <p:nvSpPr>
-          <p:cNvPr id="4" name="TextBox 3"/>
-          <p:cNvSpPr txBox="1"/>
-          <p:nvPr/>
-        </p:nvSpPr>
-        <p:spPr>
-          <a:xfrm>
-            <a:off x="731520" y="777240"/>
-            <a:ext cx="10698480" cy="731520"/>
-          </a:xfrm>
-          <a:prstGeom prst="rect">
-            <a:avLst/>
-          </a:prstGeom>
-          <a:noFill/>
-        </p:spPr>
-        <p:txBody>
-          <a:bodyPr wrap="square">
-            <a:spAutoFit/>
-          </a:bodyPr>
-          <a:lstStyle/>
-          <a:p>
-            <a:pPr>
-              <a:defRPr sz="2800" b="1">
-                <a:solidFill>
-                  <a:srgbClr val="F8FAFC"/>
-                </a:solidFill>
-              </a:defRPr>
-            </a:pPr>
-            <a:r>
-              <a:t>Kubernetes Orchestration &amp; ArgoCD GitOps</a:t>
-            </a:r>
-          </a:p>
-        </p:txBody>
-      </p:sp>
-      <p:sp>
-        <p:nvSpPr>
-          <p:cNvPr id="5" name="Rounded Rectangle 4"/>
-          <p:cNvSpPr/>
-          <p:nvPr/>
-        </p:nvSpPr>
-        <p:spPr>
-          <a:xfrm>
-            <a:off x="731520" y="1645920"/>
-            <a:ext cx="5120640" cy="4572000"/>
-          </a:xfrm>
-          <a:prstGeom prst="roundRect">
-            <a:avLst/>
-          </a:prstGeom>
-          <a:solidFill>
-            <a:srgbClr val="1E293B"/>
-          </a:solidFill>
-          <a:ln>
-            <a:solidFill>
-              <a:srgbClr val="6366F1"/>
-            </a:solidFill>
-          </a:ln>
-        </p:spPr>
-        <p:style>
-          <a:lnRef idx="1">
-            <a:schemeClr val="accent1"/>
-          </a:lnRef>
-          <a:fillRef idx="3">
-            <a:schemeClr val="accent1"/>
-          </a:fillRef>
-          <a:effectRef idx="2">
-            <a:schemeClr val="accent1"/>
-          </a:effectRef>
-          <a:fontRef idx="minor">
-            <a:schemeClr val="lt1"/>
-          </a:fontRef>
-        </p:style>
-        <p:txBody>
-          <a:bodyPr rtlCol="0" anchor="ctr" wrap="square"/>
-          <a:lstStyle/>
-          <a:p>
-            <a:pPr algn="ctr">
-              <a:defRPr sz="1800" b="1">
-                <a:solidFill>
-                  <a:srgbClr val="38BDF8"/>
-                </a:solidFill>
-              </a:defRPr>
-            </a:pPr>
-            <a:r>
-              <a:t>Helm Package &amp; Workload Design</a:t>
-            </a:r>
-            <a:br/>
-          </a:p>
-          <a:p>
-            <a:pPr>
-              <a:defRPr sz="1200">
-                <a:solidFill>
-                  <a:srgbClr val="F8FAFC"/>
-                </a:solidFill>
-              </a:defRPr>
-            </a:pPr>
-            <a:r>
-              <a:t>• High Availability: 2 replicas each for frontend and backend deployments.</a:t>
-            </a:r>
-          </a:p>
-          <a:p>
-            <a:pPr>
-              <a:defRPr sz="1200">
-                <a:solidFill>
-                  <a:srgbClr val="F8FAFC"/>
-                </a:solidFill>
-              </a:defRPr>
-            </a:pPr>
-            <a:r>
-              <a:t>• Resource Governance: Explicit CPU and Memory requests and limits preventing noisy neighbors.</a:t>
-            </a:r>
-          </a:p>
-          <a:p>
-            <a:pPr>
-              <a:defRPr sz="1200">
-                <a:solidFill>
-                  <a:srgbClr val="F8FAFC"/>
-                </a:solidFill>
-              </a:defRPr>
-            </a:pPr>
-            <a:r>
-              <a:t>• Self-Healing: Liveness and readiness probes restart failing pods and withhold traffic until healthy.</a:t>
-            </a:r>
-          </a:p>
-          <a:p>
-            <a:pPr>
-              <a:defRPr sz="1200">
-                <a:solidFill>
-                  <a:srgbClr val="F8FAFC"/>
-                </a:solidFill>
-              </a:defRPr>
-            </a:pPr>
-            <a:r>
-              <a:t>• Horizontal Pod Autoscaling (HPA): Automatically scales pods between 2 and 6 replicas at 60% CPU.</a:t>
-            </a:r>
-          </a:p>
-          <a:p>
-            <a:pPr>
-              <a:defRPr sz="1200">
-                <a:solidFill>
-                  <a:srgbClr val="F8FAFC"/>
-                </a:solidFill>
-              </a:defRPr>
-            </a:pPr>
-            <a:r>
-              <a:t>• Unified Ingress: Routes host traffic seamlessly between API and UI services.</a:t>
-            </a:r>
-          </a:p>
-        </p:txBody>
-      </p:sp>
-      <p:sp>
-        <p:nvSpPr>
-          <p:cNvPr id="6" name="Rounded Rectangle 5"/>
-          <p:cNvSpPr/>
-          <p:nvPr/>
-        </p:nvSpPr>
-        <p:spPr>
-          <a:xfrm>
-            <a:off x="6217920" y="1645920"/>
-            <a:ext cx="5212080" cy="4572000"/>
-          </a:xfrm>
-          <a:prstGeom prst="roundRect">
-            <a:avLst/>
-          </a:prstGeom>
-          <a:solidFill>
-            <a:srgbClr val="1E293B"/>
-          </a:solidFill>
-          <a:ln>
-            <a:solidFill>
-              <a:srgbClr val="6366F1"/>
-            </a:solidFill>
-          </a:ln>
-        </p:spPr>
-        <p:style>
-          <a:lnRef idx="1">
-            <a:schemeClr val="accent1"/>
-          </a:lnRef>
-          <a:fillRef idx="3">
-            <a:schemeClr val="accent1"/>
-          </a:fillRef>
-          <a:effectRef idx="2">
-            <a:schemeClr val="accent1"/>
-          </a:effectRef>
-          <a:fontRef idx="minor">
-            <a:schemeClr val="lt1"/>
-          </a:fontRef>
-        </p:style>
-        <p:txBody>
-          <a:bodyPr rtlCol="0" anchor="ctr" wrap="square"/>
-          <a:lstStyle/>
-          <a:p>
-            <a:pPr algn="ctr">
-              <a:defRPr sz="1800" b="1">
-                <a:solidFill>
-                  <a:srgbClr val="38BDF8"/>
-                </a:solidFill>
-              </a:defRPr>
-            </a:pPr>
-            <a:r>
-              <a:t>ArgoCD GitOps Workflow</a:t>
-            </a:r>
-            <a:br/>
-          </a:p>
-          <a:p>
-            <a:pPr>
-              <a:defRPr sz="1200">
-                <a:solidFill>
-                  <a:srgbClr val="F8FAFC"/>
-                </a:solidFill>
-              </a:defRPr>
-            </a:pPr>
-            <a:r>
-              <a:t>• Declarative Single Source of Truth: Git repo defines desired cluster state.</a:t>
-            </a:r>
-          </a:p>
-          <a:p>
-            <a:pPr>
-              <a:defRPr sz="1200">
-                <a:solidFill>
-                  <a:srgbClr val="F8FAFC"/>
-                </a:solidFill>
-              </a:defRPr>
-            </a:pPr>
-            <a:r>
-              <a:t>• Automated Reconciliation: ArgoCD detects drift between Git and live cluster, applying changes automatically.</a:t>
-            </a:r>
-          </a:p>
-          <a:p>
-            <a:pPr>
-              <a:defRPr sz="1200">
-                <a:solidFill>
-                  <a:srgbClr val="F8FAFC"/>
-                </a:solidFill>
-              </a:defRPr>
-            </a:pPr>
-            <a:r>
-              <a:t>• Self-Healing: Out-of-band manual changes are automatically rolled back to match Git.</a:t>
-            </a:r>
-          </a:p>
-          <a:p>
-            <a:pPr>
-              <a:defRPr sz="1200">
-                <a:solidFill>
-                  <a:srgbClr val="F8FAFC"/>
-                </a:solidFill>
-              </a:defRPr>
-            </a:pPr>
-            <a:r>
-              <a:t>• Zero Direct Cluster Access: Engineers push commits rather than running imperative kubectl commands.</a:t>
+          <p:cNvPr id="2" name="Title 1"/>
+          <p:cNvSpPr>
+            <a:spLocks noGrp="1"/>
+          </p:cNvSpPr>
+          <p:nvPr>
+            <p:ph type="title"/>
+          </p:nvPr>
+        </p:nvSpPr>
+        <p:spPr/>
+        <p:txBody>
+          <a:bodyPr/>
+          <a:lstStyle/>
+          <a:p>
+            <a:r>
+              <a:rPr>
+                <a:solidFill>
+                  <a:srgbClr val="1B6EC3"/>
+                </a:solidFill>
+              </a:rPr>
+              <a:t>9. Observability: Prometheus + Grafana</a:t>
+            </a:r>
+          </a:p>
+        </p:txBody>
+      </p:sp>
+      <p:sp>
+        <p:nvSpPr>
+          <p:cNvPr id="3" name="Content Placeholder 2"/>
+          <p:cNvSpPr>
+            <a:spLocks noGrp="1"/>
+          </p:cNvSpPr>
+          <p:nvPr>
+            <p:ph idx="1"/>
+          </p:nvPr>
+        </p:nvSpPr>
+        <p:spPr/>
+        <p:txBody>
+          <a:bodyPr wrap="square"/>
+          <a:lstStyle/>
+          <a:p>
+            <a:pPr>
+              <a:spcAft>
+                <a:spcPts val="800"/>
+              </a:spcAft>
+              <a:defRPr sz="2000">
+                <a:solidFill>
+                  <a:srgbClr val="222222"/>
+                </a:solidFill>
+              </a:defRPr>
+            </a:pPr>
+            <a:r>
+              <a:t>Backend exposes Prometheus metrics at /metrics (requests, latency histogram, status codes).</a:t>
+            </a:r>
+          </a:p>
+          <a:p>
+            <a:pPr>
+              <a:spcAft>
+                <a:spcPts val="800"/>
+              </a:spcAft>
+              <a:defRPr sz="2000">
+                <a:solidFill>
+                  <a:srgbClr val="222222"/>
+                </a:solidFill>
+              </a:defRPr>
+            </a:pPr>
+            <a:r>
+              <a:t>Prometheus target verified UP, scraping the backend service every 10s.</a:t>
+            </a:r>
+          </a:p>
+          <a:p>
+            <a:pPr>
+              <a:spcAft>
+                <a:spcPts val="800"/>
+              </a:spcAft>
+              <a:defRPr sz="2000">
+                <a:solidFill>
+                  <a:srgbClr val="222222"/>
+                </a:solidFill>
+              </a:defRPr>
+            </a:pPr>
+            <a:r>
+              <a:t>Grafana provisioned with Prometheus datasource + 8-panel reliability dashboard.</a:t>
+            </a:r>
+          </a:p>
+          <a:p>
+            <a:pPr>
+              <a:spcAft>
+                <a:spcPts val="800"/>
+              </a:spcAft>
+              <a:defRPr sz="2000">
+                <a:solidFill>
+                  <a:srgbClr val="222222"/>
+                </a:solidFill>
+              </a:defRPr>
+            </a:pPr>
+            <a:r>
+              <a:t>Panel query sum(rate(http_requests_total[5m])) verified returning live req/s data.</a:t>
+            </a:r>
+          </a:p>
+          <a:p>
+            <a:pPr>
+              <a:spcAft>
+                <a:spcPts val="800"/>
+              </a:spcAft>
+              <a:defRPr sz="2000">
+                <a:solidFill>
+                  <a:srgbClr val="222222"/>
+                </a:solidFill>
+              </a:defRPr>
+            </a:pPr>
+            <a:r>
+              <a:t>Dashboard JSON committed at monitoring/grafana-dashboard.json (reproducible import).</a:t>
             </a:r>
           </a:p>
         </p:txBody>

--- a/demo/presentation.pptx
+++ b/demo/presentation.pptx
@@ -4126,7 +4126,22 @@
               </a:defRPr>
             </a:pPr>
             <a:r>
-              <a:t>29 backend pytest tests (health, CRUD incl. PUT/PATCH, validation, 404s, pagination, stats, metrics) - all passing.</a:t>
+              <a:t>29 backend pytest tests (health, CRUD incl. PUT/PATCH, validation, 404s, pagination, stats, metrics).</a:t>
+            </a:r>
+          </a:p>
+          <a:p>
+            <a:pPr>
+              <a:spcAft>
+                <a:spcPts val="800"/>
+              </a:spcAft>
+              <a:defRPr sz="2000">
+                <a:solidFill>
+                  <a:srgbClr val="222222"/>
+                </a:solidFill>
+              </a:defRPr>
+            </a:pPr>
+            <a:r>
+              <a:t>All 29 tests passing on every run.</a:t>
             </a:r>
           </a:p>
           <a:p>

--- a/demo/presentation.pptx
+++ b/demo/presentation.pptx
@@ -3616,7 +3616,7 @@
               </a:defRPr>
             </a:pPr>
             <a:r>
-              <a:t>Submit: repo URL + this deck + demo video recorded per WALKTHROUGH_SCRIPT.md.</a:t>
+              <a:t>Submit: repo URL plus this slide deck.</a:t>
             </a:r>
           </a:p>
         </p:txBody>
